--- a/public/lessons/year-6-maths/spring/week-20/retrieve-fraction-methods/teaching-powerpoint-v1.pptx
+++ b/public/lessons/year-6-maths/spring/week-20/retrieve-fraction-methods/teaching-powerpoint-v1.pptx
@@ -2,24 +2,24 @@
 <file path=ppt/presentation.xml><?xml version="1.0" encoding="utf-8"?>
 <p:presentation xmlns:p="http://schemas.openxmlformats.org/presentationml/2006/main">
   <p:sldMasterIdLst>
-    <p:sldMasterId xmlns:r="http://schemas.openxmlformats.org/officeDocument/2006/relationships" id="2147483648" r:id="R1b564aefade64965"/>
+    <p:sldMasterId xmlns:r="http://schemas.openxmlformats.org/officeDocument/2006/relationships" id="2147483648" r:id="R147269d9393649c3"/>
   </p:sldMasterIdLst>
   <p:notesMasterIdLst>
-    <p:notesMasterId xmlns:r="http://schemas.openxmlformats.org/officeDocument/2006/relationships" r:id="Ree55fb374421467d"/>
+    <p:notesMasterId xmlns:r="http://schemas.openxmlformats.org/officeDocument/2006/relationships" r:id="R75600e7fe9744fb8"/>
   </p:notesMasterIdLst>
   <p:sldIdLst>
-    <p:sldId xmlns:r="http://schemas.openxmlformats.org/officeDocument/2006/relationships" id="256" r:id="Rdaebfabfdcb844be"/>
-    <p:sldId xmlns:r="http://schemas.openxmlformats.org/officeDocument/2006/relationships" id="257" r:id="Rffa92351a2ee4469"/>
-    <p:sldId xmlns:r="http://schemas.openxmlformats.org/officeDocument/2006/relationships" id="258" r:id="R563deaf27fe041a9"/>
-    <p:sldId xmlns:r="http://schemas.openxmlformats.org/officeDocument/2006/relationships" id="259" r:id="R7004effcdf724a9b"/>
-    <p:sldId xmlns:r="http://schemas.openxmlformats.org/officeDocument/2006/relationships" id="260" r:id="R5166b33219d84938"/>
-    <p:sldId xmlns:r="http://schemas.openxmlformats.org/officeDocument/2006/relationships" id="261" r:id="R12e47a029a1a42b9"/>
-    <p:sldId xmlns:r="http://schemas.openxmlformats.org/officeDocument/2006/relationships" id="262" r:id="Ra12432bcbc8e4213"/>
-    <p:sldId xmlns:r="http://schemas.openxmlformats.org/officeDocument/2006/relationships" id="263" r:id="R12bdd21e05804c29"/>
-    <p:sldId xmlns:r="http://schemas.openxmlformats.org/officeDocument/2006/relationships" id="264" r:id="R79e2f533daa64ca9"/>
-    <p:sldId xmlns:r="http://schemas.openxmlformats.org/officeDocument/2006/relationships" id="265" r:id="Rc6a8852c5d5d4eb0"/>
-    <p:sldId xmlns:r="http://schemas.openxmlformats.org/officeDocument/2006/relationships" id="266" r:id="Rf3cdafd0488b42ab"/>
-    <p:sldId xmlns:r="http://schemas.openxmlformats.org/officeDocument/2006/relationships" id="267" r:id="R6e3a0346bb4442fe"/>
+    <p:sldId xmlns:r="http://schemas.openxmlformats.org/officeDocument/2006/relationships" id="256" r:id="R9a57fe58b72e478d"/>
+    <p:sldId xmlns:r="http://schemas.openxmlformats.org/officeDocument/2006/relationships" id="257" r:id="R06be897a875a4da1"/>
+    <p:sldId xmlns:r="http://schemas.openxmlformats.org/officeDocument/2006/relationships" id="258" r:id="R3995ddc35ef844f3"/>
+    <p:sldId xmlns:r="http://schemas.openxmlformats.org/officeDocument/2006/relationships" id="259" r:id="R1635290e63b14d10"/>
+    <p:sldId xmlns:r="http://schemas.openxmlformats.org/officeDocument/2006/relationships" id="260" r:id="Rc9292c3ca66844e0"/>
+    <p:sldId xmlns:r="http://schemas.openxmlformats.org/officeDocument/2006/relationships" id="261" r:id="R6f828792bf084e60"/>
+    <p:sldId xmlns:r="http://schemas.openxmlformats.org/officeDocument/2006/relationships" id="262" r:id="Radb3478cc94a490d"/>
+    <p:sldId xmlns:r="http://schemas.openxmlformats.org/officeDocument/2006/relationships" id="263" r:id="R499825f1735b47e5"/>
+    <p:sldId xmlns:r="http://schemas.openxmlformats.org/officeDocument/2006/relationships" id="264" r:id="Rc4446b77e4d14892"/>
+    <p:sldId xmlns:r="http://schemas.openxmlformats.org/officeDocument/2006/relationships" id="265" r:id="R2793547761c74cbf"/>
+    <p:sldId xmlns:r="http://schemas.openxmlformats.org/officeDocument/2006/relationships" id="266" r:id="R11a0e44697594790"/>
+    <p:sldId xmlns:r="http://schemas.openxmlformats.org/officeDocument/2006/relationships" id="267" r:id="Rd9bf6f21d58a4fde"/>
   </p:sldIdLst>
   <p:sldSz cx="12192000" cy="6858000"/>
   <p:notesSz cx="6858000" cy="9144000"/>
@@ -873,7 +873,7 @@
           <a:lstStyle xmlns:a="http://schemas.openxmlformats.org/drawingml/2006/main"/>
           <a:p xmlns:a="http://schemas.openxmlformats.org/drawingml/2006/main">
             <a:r>
-              <a:t>I do. Reveal the question, setup and each calculation stage one click at a time. Pupils watch before copying. Model answer: 1 5/12.</a:t>
+              <a:t>I do. Reveal the question, then reveal each mathematical change one click at a time. Point to the numbers and operation that changed before moving to the next line. Final answer: 1 5/12.</a:t>
             </a:r>
           </a:p>
         </p:txBody>
@@ -1291,7 +1291,7 @@
   </p:cSld>
   <p:clrMap bg1="lt1" tx1="dk1" bg2="lt2" tx2="dk2" accent1="accent1" accent2="accent2" accent3="accent3" accent4="accent4" accent5="accent5" accent6="accent6" hlink="hlink" folHlink="folHlink"/>
   <p:sldLayoutIdLst>
-    <p:sldLayoutId xmlns:r="http://schemas.openxmlformats.org/officeDocument/2006/relationships" id="2147483649" r:id="Rffb8231f2e874310"/>
+    <p:sldLayoutId xmlns:r="http://schemas.openxmlformats.org/officeDocument/2006/relationships" id="2147483649" r:id="R124f40c3b5f24fc7"/>
   </p:sldLayoutIdLst>
   <p:txStyles>
     <p:titleStyle>
@@ -1842,7 +1842,7 @@
           <p:cNvPr id="12" name="">
             <a:extLst xmlns:a="http://schemas.openxmlformats.org/drawingml/2006/main">
               <a:ext uri="{FF2B5EF4-FFF2-40B4-BE49-F238E27FC236}">
-                <a16:creationId xmlns:a16="http://schemas.microsoft.com/office/drawing/2014/main" id="{159625ED-4AA2-40F5-825B-65F94A4CDC67}"/>
+                <a16:creationId xmlns:a16="http://schemas.microsoft.com/office/drawing/2014/main" id="{31225325-FE95-4339-9135-AF1506E23A93}"/>
               </a:ext>
             </a:extLst>
           </p:cNvPr>
@@ -1874,7 +1874,7 @@
           <p:cNvPr id="2" name="">
             <a:extLst xmlns:a="http://schemas.openxmlformats.org/drawingml/2006/main">
               <a:ext uri="{FF2B5EF4-FFF2-40B4-BE49-F238E27FC236}">
-                <a16:creationId xmlns:a16="http://schemas.microsoft.com/office/drawing/2014/main" id="{6E75AEDA-AEDB-4CD6-85CF-A7DB21FE897D}"/>
+                <a16:creationId xmlns:a16="http://schemas.microsoft.com/office/drawing/2014/main" id="{4C4F9C8B-15D7-427B-AB95-1031307631BE}"/>
               </a:ext>
             </a:extLst>
           </p:cNvPr>
@@ -1931,7 +1931,7 @@
           <p:cNvPr id="3" name="">
             <a:extLst xmlns:a="http://schemas.openxmlformats.org/drawingml/2006/main">
               <a:ext uri="{FF2B5EF4-FFF2-40B4-BE49-F238E27FC236}">
-                <a16:creationId xmlns:a16="http://schemas.microsoft.com/office/drawing/2014/main" id="{77E65518-4C2E-41FC-A8E4-704C782B2CD6}"/>
+                <a16:creationId xmlns:a16="http://schemas.microsoft.com/office/drawing/2014/main" id="{3ADB78C0-0E39-47CD-B8D1-612533CFCD60}"/>
               </a:ext>
             </a:extLst>
           </p:cNvPr>
@@ -1965,7 +1965,7 @@
           <p:cNvPr id="4" name="">
             <a:extLst xmlns:a="http://schemas.openxmlformats.org/drawingml/2006/main">
               <a:ext uri="{FF2B5EF4-FFF2-40B4-BE49-F238E27FC236}">
-                <a16:creationId xmlns:a16="http://schemas.microsoft.com/office/drawing/2014/main" id="{0E60ABD7-28E5-4C87-A4E4-A6F2341EA89A}"/>
+                <a16:creationId xmlns:a16="http://schemas.microsoft.com/office/drawing/2014/main" id="{DE4CB4B2-E9F9-4B97-875A-8A396790755A}"/>
               </a:ext>
             </a:extLst>
           </p:cNvPr>
@@ -2022,7 +2022,7 @@
           <p:cNvPr id="5" name="">
             <a:extLst xmlns:a="http://schemas.openxmlformats.org/drawingml/2006/main">
               <a:ext uri="{FF2B5EF4-FFF2-40B4-BE49-F238E27FC236}">
-                <a16:creationId xmlns:a16="http://schemas.microsoft.com/office/drawing/2014/main" id="{91D0781D-51F0-4884-BDB1-5CD476403BC6}"/>
+                <a16:creationId xmlns:a16="http://schemas.microsoft.com/office/drawing/2014/main" id="{DA136095-B94D-470A-AA26-54ECF230B84B}"/>
               </a:ext>
             </a:extLst>
           </p:cNvPr>
@@ -2079,7 +2079,7 @@
           <p:cNvPr id="6" name="">
             <a:extLst xmlns:a="http://schemas.openxmlformats.org/drawingml/2006/main">
               <a:ext uri="{FF2B5EF4-FFF2-40B4-BE49-F238E27FC236}">
-                <a16:creationId xmlns:a16="http://schemas.microsoft.com/office/drawing/2014/main" id="{E450703E-70C5-4CA5-A5D6-6F3864B1D1FF}"/>
+                <a16:creationId xmlns:a16="http://schemas.microsoft.com/office/drawing/2014/main" id="{A09E48FF-B317-421D-9CCB-C437BCFBB3E2}"/>
               </a:ext>
             </a:extLst>
           </p:cNvPr>
@@ -2113,7 +2113,7 @@
           <p:cNvPr id="7" name="">
             <a:extLst xmlns:a="http://schemas.openxmlformats.org/drawingml/2006/main">
               <a:ext uri="{FF2B5EF4-FFF2-40B4-BE49-F238E27FC236}">
-                <a16:creationId xmlns:a16="http://schemas.microsoft.com/office/drawing/2014/main" id="{C48C79A9-CD43-4562-93CF-F0D94EC38020}"/>
+                <a16:creationId xmlns:a16="http://schemas.microsoft.com/office/drawing/2014/main" id="{7FB41AF4-E97B-4387-86D6-FD3E44D8C28C}"/>
               </a:ext>
             </a:extLst>
           </p:cNvPr>
@@ -2170,7 +2170,7 @@
           <p:cNvPr id="8" name="">
             <a:extLst xmlns:a="http://schemas.openxmlformats.org/drawingml/2006/main">
               <a:ext uri="{FF2B5EF4-FFF2-40B4-BE49-F238E27FC236}">
-                <a16:creationId xmlns:a16="http://schemas.microsoft.com/office/drawing/2014/main" id="{737CBAE1-725A-454C-96BC-4B17E6E8F257}"/>
+                <a16:creationId xmlns:a16="http://schemas.microsoft.com/office/drawing/2014/main" id="{4A696903-CF5A-455A-846A-C52E20A1FC23}"/>
               </a:ext>
             </a:extLst>
           </p:cNvPr>
@@ -2227,7 +2227,7 @@
           <p:cNvPr id="9" name="">
             <a:extLst xmlns:a="http://schemas.openxmlformats.org/drawingml/2006/main">
               <a:ext uri="{FF2B5EF4-FFF2-40B4-BE49-F238E27FC236}">
-                <a16:creationId xmlns:a16="http://schemas.microsoft.com/office/drawing/2014/main" id="{E0C19382-D1BF-4655-A60F-BD55C60A65C8}"/>
+                <a16:creationId xmlns:a16="http://schemas.microsoft.com/office/drawing/2014/main" id="{7D91AD58-87CA-45FD-BC4A-DF1A8A974431}"/>
               </a:ext>
             </a:extLst>
           </p:cNvPr>
@@ -2284,7 +2284,7 @@
           <p:cNvPr id="10" name="">
             <a:extLst xmlns:a="http://schemas.openxmlformats.org/drawingml/2006/main">
               <a:ext uri="{FF2B5EF4-FFF2-40B4-BE49-F238E27FC236}">
-                <a16:creationId xmlns:a16="http://schemas.microsoft.com/office/drawing/2014/main" id="{DAE819F9-85E7-473B-9FD3-92DB7C9AAD1E}"/>
+                <a16:creationId xmlns:a16="http://schemas.microsoft.com/office/drawing/2014/main" id="{567F4532-0C21-4641-94DF-D0096032A861}"/>
               </a:ext>
             </a:extLst>
           </p:cNvPr>
@@ -2341,7 +2341,7 @@
           <p:cNvPr id="11" name="">
             <a:extLst xmlns:a="http://schemas.openxmlformats.org/drawingml/2006/main">
               <a:ext uri="{FF2B5EF4-FFF2-40B4-BE49-F238E27FC236}">
-                <a16:creationId xmlns:a16="http://schemas.microsoft.com/office/drawing/2014/main" id="{771F0CFD-9B0C-4683-A357-FC9B3E30A5C7}"/>
+                <a16:creationId xmlns:a16="http://schemas.microsoft.com/office/drawing/2014/main" id="{A835DA02-09F9-429E-849E-7F37FD1AD1B7}"/>
               </a:ext>
             </a:extLst>
           </p:cNvPr>
@@ -2396,7 +2396,7 @@
     </p:spTree>
     <p:extLst>
       <p:ext uri="{BB962C8B-B14F-4D97-AF65-F5344CB8AC3E}">
-        <p14:creationId xmlns:p14="http://schemas.microsoft.com/office/powerpoint/2010/main" val="1356291359"/>
+        <p14:creationId xmlns:p14="http://schemas.microsoft.com/office/powerpoint/2010/main" val="143706693"/>
       </p:ext>
     </p:extLst>
   </p:cSld>
@@ -2427,7 +2427,7 @@
           <p:cNvPr id="14" name="">
             <a:extLst xmlns:a="http://schemas.openxmlformats.org/drawingml/2006/main">
               <a:ext uri="{FF2B5EF4-FFF2-40B4-BE49-F238E27FC236}">
-                <a16:creationId xmlns:a16="http://schemas.microsoft.com/office/drawing/2014/main" id="{19181B66-CDEE-43C5-AD9D-1E3B247862A4}"/>
+                <a16:creationId xmlns:a16="http://schemas.microsoft.com/office/drawing/2014/main" id="{6D78E1EC-9A78-4E2C-B358-BC78E1CB4420}"/>
               </a:ext>
             </a:extLst>
           </p:cNvPr>
@@ -2459,7 +2459,7 @@
           <p:cNvPr id="2" name="">
             <a:extLst xmlns:a="http://schemas.openxmlformats.org/drawingml/2006/main">
               <a:ext uri="{FF2B5EF4-FFF2-40B4-BE49-F238E27FC236}">
-                <a16:creationId xmlns:a16="http://schemas.microsoft.com/office/drawing/2014/main" id="{0A049C76-2EEF-4F99-836A-510A222F0D4B}"/>
+                <a16:creationId xmlns:a16="http://schemas.microsoft.com/office/drawing/2014/main" id="{AA8D6F95-5FAD-4C2A-9DA0-D116D0AB681E}"/>
               </a:ext>
             </a:extLst>
           </p:cNvPr>
@@ -2516,7 +2516,7 @@
           <p:cNvPr id="3" name="">
             <a:extLst xmlns:a="http://schemas.openxmlformats.org/drawingml/2006/main">
               <a:ext uri="{FF2B5EF4-FFF2-40B4-BE49-F238E27FC236}">
-                <a16:creationId xmlns:a16="http://schemas.microsoft.com/office/drawing/2014/main" id="{A2FAA983-6AF2-4BA7-8EF0-41E682F49079}"/>
+                <a16:creationId xmlns:a16="http://schemas.microsoft.com/office/drawing/2014/main" id="{CF4931A6-E200-4611-BF83-F4A23FA3F79C}"/>
               </a:ext>
             </a:extLst>
           </p:cNvPr>
@@ -2548,7 +2548,7 @@
           <p:cNvPr id="4" name="">
             <a:extLst xmlns:a="http://schemas.openxmlformats.org/drawingml/2006/main">
               <a:ext uri="{FF2B5EF4-FFF2-40B4-BE49-F238E27FC236}">
-                <a16:creationId xmlns:a16="http://schemas.microsoft.com/office/drawing/2014/main" id="{99F79750-EB2E-4BCF-8051-94AE814C7C65}"/>
+                <a16:creationId xmlns:a16="http://schemas.microsoft.com/office/drawing/2014/main" id="{85914E49-2CE0-4BF5-9B16-2506530FC504}"/>
               </a:ext>
             </a:extLst>
           </p:cNvPr>
@@ -2605,7 +2605,7 @@
           <p:cNvPr id="5" name="">
             <a:extLst xmlns:a="http://schemas.openxmlformats.org/drawingml/2006/main">
               <a:ext uri="{FF2B5EF4-FFF2-40B4-BE49-F238E27FC236}">
-                <a16:creationId xmlns:a16="http://schemas.microsoft.com/office/drawing/2014/main" id="{4003FE45-00D8-427B-941A-AB6BB1D399FD}"/>
+                <a16:creationId xmlns:a16="http://schemas.microsoft.com/office/drawing/2014/main" id="{D8A589F0-C5CB-4152-8D2A-9B8F1F268292}"/>
               </a:ext>
             </a:extLst>
           </p:cNvPr>
@@ -2662,7 +2662,7 @@
           <p:cNvPr id="6" name="">
             <a:extLst xmlns:a="http://schemas.openxmlformats.org/drawingml/2006/main">
               <a:ext uri="{FF2B5EF4-FFF2-40B4-BE49-F238E27FC236}">
-                <a16:creationId xmlns:a16="http://schemas.microsoft.com/office/drawing/2014/main" id="{65221F45-A6C0-4D11-A760-4E57E9738D90}"/>
+                <a16:creationId xmlns:a16="http://schemas.microsoft.com/office/drawing/2014/main" id="{7139A650-49C4-4A7E-8CF9-87F4C1B09EC1}"/>
               </a:ext>
             </a:extLst>
           </p:cNvPr>
@@ -2719,7 +2719,7 @@
           <p:cNvPr id="7" name="">
             <a:extLst xmlns:a="http://schemas.openxmlformats.org/drawingml/2006/main">
               <a:ext uri="{FF2B5EF4-FFF2-40B4-BE49-F238E27FC236}">
-                <a16:creationId xmlns:a16="http://schemas.microsoft.com/office/drawing/2014/main" id="{5BB35D52-FC9F-47CF-9057-E35A5731D859}"/>
+                <a16:creationId xmlns:a16="http://schemas.microsoft.com/office/drawing/2014/main" id="{F5ACACBC-5328-4C9F-9739-0CDC300339BE}"/>
               </a:ext>
             </a:extLst>
           </p:cNvPr>
@@ -2751,7 +2751,7 @@
           <p:cNvPr id="8" name="">
             <a:extLst xmlns:a="http://schemas.openxmlformats.org/drawingml/2006/main">
               <a:ext uri="{FF2B5EF4-FFF2-40B4-BE49-F238E27FC236}">
-                <a16:creationId xmlns:a16="http://schemas.microsoft.com/office/drawing/2014/main" id="{5B7EF6F6-7D3C-4BE4-8803-C567D91B7D71}"/>
+                <a16:creationId xmlns:a16="http://schemas.microsoft.com/office/drawing/2014/main" id="{0747EAAD-387F-4525-83C2-08B8CAFB2AD6}"/>
               </a:ext>
             </a:extLst>
           </p:cNvPr>
@@ -2808,7 +2808,7 @@
           <p:cNvPr id="9" name="">
             <a:extLst xmlns:a="http://schemas.openxmlformats.org/drawingml/2006/main">
               <a:ext uri="{FF2B5EF4-FFF2-40B4-BE49-F238E27FC236}">
-                <a16:creationId xmlns:a16="http://schemas.microsoft.com/office/drawing/2014/main" id="{D1BDC816-8DF2-4696-B7CB-0D283B388E42}"/>
+                <a16:creationId xmlns:a16="http://schemas.microsoft.com/office/drawing/2014/main" id="{034BD188-1DC6-4FE4-9180-A21F0645931B}"/>
               </a:ext>
             </a:extLst>
           </p:cNvPr>
@@ -2865,7 +2865,7 @@
           <p:cNvPr id="10" name="">
             <a:extLst xmlns:a="http://schemas.openxmlformats.org/drawingml/2006/main">
               <a:ext uri="{FF2B5EF4-FFF2-40B4-BE49-F238E27FC236}">
-                <a16:creationId xmlns:a16="http://schemas.microsoft.com/office/drawing/2014/main" id="{0E0E3392-C373-40D3-BD45-71FEB51037C3}"/>
+                <a16:creationId xmlns:a16="http://schemas.microsoft.com/office/drawing/2014/main" id="{2F1948A9-6EE9-45AF-9C67-C606A0FF21D3}"/>
               </a:ext>
             </a:extLst>
           </p:cNvPr>
@@ -2922,7 +2922,7 @@
           <p:cNvPr id="11" name="">
             <a:extLst xmlns:a="http://schemas.openxmlformats.org/drawingml/2006/main">
               <a:ext uri="{FF2B5EF4-FFF2-40B4-BE49-F238E27FC236}">
-                <a16:creationId xmlns:a16="http://schemas.microsoft.com/office/drawing/2014/main" id="{D0E96E11-CD1B-4639-823C-81C3DB716A09}"/>
+                <a16:creationId xmlns:a16="http://schemas.microsoft.com/office/drawing/2014/main" id="{81E203F5-9FA0-4104-82A8-69FEE96D74AC}"/>
               </a:ext>
             </a:extLst>
           </p:cNvPr>
@@ -2979,7 +2979,7 @@
           <p:cNvPr id="12" name="">
             <a:extLst xmlns:a="http://schemas.openxmlformats.org/drawingml/2006/main">
               <a:ext uri="{FF2B5EF4-FFF2-40B4-BE49-F238E27FC236}">
-                <a16:creationId xmlns:a16="http://schemas.microsoft.com/office/drawing/2014/main" id="{9F13B2D6-0152-40F5-8C92-673A8AB58F51}"/>
+                <a16:creationId xmlns:a16="http://schemas.microsoft.com/office/drawing/2014/main" id="{E28DBAAF-1125-49E0-A406-4D39D8B3FE80}"/>
               </a:ext>
             </a:extLst>
           </p:cNvPr>
@@ -3036,7 +3036,7 @@
           <p:cNvPr id="13" name="">
             <a:extLst xmlns:a="http://schemas.openxmlformats.org/drawingml/2006/main">
               <a:ext uri="{FF2B5EF4-FFF2-40B4-BE49-F238E27FC236}">
-                <a16:creationId xmlns:a16="http://schemas.microsoft.com/office/drawing/2014/main" id="{F017157B-ED6F-4BFD-B05C-5C37FF16EC2F}"/>
+                <a16:creationId xmlns:a16="http://schemas.microsoft.com/office/drawing/2014/main" id="{881D3A2F-FD0D-4E05-99B2-07D341C4A584}"/>
               </a:ext>
             </a:extLst>
           </p:cNvPr>
@@ -3091,7 +3091,7 @@
     </p:spTree>
     <p:extLst>
       <p:ext uri="{BB962C8B-B14F-4D97-AF65-F5344CB8AC3E}">
-        <p14:creationId xmlns:p14="http://schemas.microsoft.com/office/powerpoint/2010/main" val="2073274099"/>
+        <p14:creationId xmlns:p14="http://schemas.microsoft.com/office/powerpoint/2010/main" val="883940349"/>
       </p:ext>
     </p:extLst>
   </p:cSld>
@@ -3292,7 +3292,7 @@
           <p:cNvPr id="19" name="">
             <a:extLst xmlns:a="http://schemas.openxmlformats.org/drawingml/2006/main">
               <a:ext uri="{FF2B5EF4-FFF2-40B4-BE49-F238E27FC236}">
-                <a16:creationId xmlns:a16="http://schemas.microsoft.com/office/drawing/2014/main" id="{85734EF3-BE27-41C0-AAF6-35B97645BEC9}"/>
+                <a16:creationId xmlns:a16="http://schemas.microsoft.com/office/drawing/2014/main" id="{1FE21F49-DEDB-48A8-B426-C472F8C5F4A5}"/>
               </a:ext>
             </a:extLst>
           </p:cNvPr>
@@ -3324,7 +3324,7 @@
           <p:cNvPr id="2" name="">
             <a:extLst xmlns:a="http://schemas.openxmlformats.org/drawingml/2006/main">
               <a:ext uri="{FF2B5EF4-FFF2-40B4-BE49-F238E27FC236}">
-                <a16:creationId xmlns:a16="http://schemas.microsoft.com/office/drawing/2014/main" id="{9D4FA667-4B16-450F-972C-D26E51303995}"/>
+                <a16:creationId xmlns:a16="http://schemas.microsoft.com/office/drawing/2014/main" id="{00976FEE-1025-4F59-90CF-DB37E83FBCF9}"/>
               </a:ext>
             </a:extLst>
           </p:cNvPr>
@@ -3381,7 +3381,7 @@
           <p:cNvPr id="3" name="">
             <a:extLst xmlns:a="http://schemas.openxmlformats.org/drawingml/2006/main">
               <a:ext uri="{FF2B5EF4-FFF2-40B4-BE49-F238E27FC236}">
-                <a16:creationId xmlns:a16="http://schemas.microsoft.com/office/drawing/2014/main" id="{383537AA-4FA9-4E85-ABE5-32A992D12264}"/>
+                <a16:creationId xmlns:a16="http://schemas.microsoft.com/office/drawing/2014/main" id="{45895EFE-F1D9-4332-B45A-A31190B09C91}"/>
               </a:ext>
             </a:extLst>
           </p:cNvPr>
@@ -3413,7 +3413,7 @@
           <p:cNvPr id="4" name="">
             <a:extLst xmlns:a="http://schemas.openxmlformats.org/drawingml/2006/main">
               <a:ext uri="{FF2B5EF4-FFF2-40B4-BE49-F238E27FC236}">
-                <a16:creationId xmlns:a16="http://schemas.microsoft.com/office/drawing/2014/main" id="{5A9F827D-EF1E-40EF-A481-36953A9305C9}"/>
+                <a16:creationId xmlns:a16="http://schemas.microsoft.com/office/drawing/2014/main" id="{A572A376-129F-4E52-8743-9C1042E6BB8E}"/>
               </a:ext>
             </a:extLst>
           </p:cNvPr>
@@ -3470,7 +3470,7 @@
           <p:cNvPr id="5" name="">
             <a:extLst xmlns:a="http://schemas.openxmlformats.org/drawingml/2006/main">
               <a:ext uri="{FF2B5EF4-FFF2-40B4-BE49-F238E27FC236}">
-                <a16:creationId xmlns:a16="http://schemas.microsoft.com/office/drawing/2014/main" id="{C8FCC3B2-EB58-44FD-90D3-3D62A56B90F3}"/>
+                <a16:creationId xmlns:a16="http://schemas.microsoft.com/office/drawing/2014/main" id="{6D5B6D0B-F29E-4D60-B367-4C0965DCFF56}"/>
               </a:ext>
             </a:extLst>
           </p:cNvPr>
@@ -3527,7 +3527,7 @@
           <p:cNvPr id="6" name="">
             <a:extLst xmlns:a="http://schemas.openxmlformats.org/drawingml/2006/main">
               <a:ext uri="{FF2B5EF4-FFF2-40B4-BE49-F238E27FC236}">
-                <a16:creationId xmlns:a16="http://schemas.microsoft.com/office/drawing/2014/main" id="{F2C23DCC-FFAE-46AC-A0DB-4FD39B46DA81}"/>
+                <a16:creationId xmlns:a16="http://schemas.microsoft.com/office/drawing/2014/main" id="{B9822D32-2897-47C7-AF78-0EC070DBCCC9}"/>
               </a:ext>
             </a:extLst>
           </p:cNvPr>
@@ -3584,7 +3584,7 @@
           <p:cNvPr id="7" name="">
             <a:extLst xmlns:a="http://schemas.openxmlformats.org/drawingml/2006/main">
               <a:ext uri="{FF2B5EF4-FFF2-40B4-BE49-F238E27FC236}">
-                <a16:creationId xmlns:a16="http://schemas.microsoft.com/office/drawing/2014/main" id="{10A83570-D32B-4D44-BE67-CD55E7D52740}"/>
+                <a16:creationId xmlns:a16="http://schemas.microsoft.com/office/drawing/2014/main" id="{F297DC4C-4A81-45D3-9E09-C82ECAA1883D}"/>
               </a:ext>
             </a:extLst>
           </p:cNvPr>
@@ -3616,7 +3616,7 @@
           <p:cNvPr id="8" name="">
             <a:extLst xmlns:a="http://schemas.openxmlformats.org/drawingml/2006/main">
               <a:ext uri="{FF2B5EF4-FFF2-40B4-BE49-F238E27FC236}">
-                <a16:creationId xmlns:a16="http://schemas.microsoft.com/office/drawing/2014/main" id="{43C12DD5-C917-4859-9916-E7543E667952}"/>
+                <a16:creationId xmlns:a16="http://schemas.microsoft.com/office/drawing/2014/main" id="{7D14DB75-BB6C-404F-8B5C-7547EFB532F8}"/>
               </a:ext>
             </a:extLst>
           </p:cNvPr>
@@ -3673,7 +3673,7 @@
           <p:cNvPr id="9" name="">
             <a:extLst xmlns:a="http://schemas.openxmlformats.org/drawingml/2006/main">
               <a:ext uri="{FF2B5EF4-FFF2-40B4-BE49-F238E27FC236}">
-                <a16:creationId xmlns:a16="http://schemas.microsoft.com/office/drawing/2014/main" id="{D22FB760-DB4E-4451-8EF7-3BAC1C53B8EB}"/>
+                <a16:creationId xmlns:a16="http://schemas.microsoft.com/office/drawing/2014/main" id="{87A4D0DC-9F79-477B-88A9-885395E941C0}"/>
               </a:ext>
             </a:extLst>
           </p:cNvPr>
@@ -3730,7 +3730,7 @@
           <p:cNvPr id="10" name="">
             <a:extLst xmlns:a="http://schemas.openxmlformats.org/drawingml/2006/main">
               <a:ext uri="{FF2B5EF4-FFF2-40B4-BE49-F238E27FC236}">
-                <a16:creationId xmlns:a16="http://schemas.microsoft.com/office/drawing/2014/main" id="{90F2EBD8-0A11-43F5-A703-13352513E8F9}"/>
+                <a16:creationId xmlns:a16="http://schemas.microsoft.com/office/drawing/2014/main" id="{CDA10458-D7AF-4D84-829E-188A123EB2A3}"/>
               </a:ext>
             </a:extLst>
           </p:cNvPr>
@@ -3787,7 +3787,7 @@
           <p:cNvPr id="11" name="">
             <a:extLst xmlns:a="http://schemas.openxmlformats.org/drawingml/2006/main">
               <a:ext uri="{FF2B5EF4-FFF2-40B4-BE49-F238E27FC236}">
-                <a16:creationId xmlns:a16="http://schemas.microsoft.com/office/drawing/2014/main" id="{95FDC212-4980-40CF-BA5D-6784325D37B5}"/>
+                <a16:creationId xmlns:a16="http://schemas.microsoft.com/office/drawing/2014/main" id="{17649F5D-9F4D-46BE-9A82-DFE28B089A04}"/>
               </a:ext>
             </a:extLst>
           </p:cNvPr>
@@ -3821,7 +3821,7 @@
           <p:cNvPr id="12" name="">
             <a:extLst xmlns:a="http://schemas.openxmlformats.org/drawingml/2006/main">
               <a:ext uri="{FF2B5EF4-FFF2-40B4-BE49-F238E27FC236}">
-                <a16:creationId xmlns:a16="http://schemas.microsoft.com/office/drawing/2014/main" id="{931FEAC1-4569-4144-B0AC-10E51D5F3760}"/>
+                <a16:creationId xmlns:a16="http://schemas.microsoft.com/office/drawing/2014/main" id="{6A9EDA38-D143-4207-A944-1B4FDBE32146}"/>
               </a:ext>
             </a:extLst>
           </p:cNvPr>
@@ -3878,7 +3878,7 @@
           <p:cNvPr id="13" name="">
             <a:extLst xmlns:a="http://schemas.openxmlformats.org/drawingml/2006/main">
               <a:ext uri="{FF2B5EF4-FFF2-40B4-BE49-F238E27FC236}">
-                <a16:creationId xmlns:a16="http://schemas.microsoft.com/office/drawing/2014/main" id="{C3AE85B5-BA39-4D87-8F86-0FE6AFC51D5F}"/>
+                <a16:creationId xmlns:a16="http://schemas.microsoft.com/office/drawing/2014/main" id="{22D01318-AF36-4A86-BAA6-7CE16E166C73}"/>
               </a:ext>
             </a:extLst>
           </p:cNvPr>
@@ -3935,7 +3935,7 @@
           <p:cNvPr id="14" name="">
             <a:extLst xmlns:a="http://schemas.openxmlformats.org/drawingml/2006/main">
               <a:ext uri="{FF2B5EF4-FFF2-40B4-BE49-F238E27FC236}">
-                <a16:creationId xmlns:a16="http://schemas.microsoft.com/office/drawing/2014/main" id="{D06011E3-5D15-45B1-92D4-660ABA1D323E}"/>
+                <a16:creationId xmlns:a16="http://schemas.microsoft.com/office/drawing/2014/main" id="{87BEF228-D162-4D08-9465-B6E5EB2B86E3}"/>
               </a:ext>
             </a:extLst>
           </p:cNvPr>
@@ -3992,7 +3992,7 @@
           <p:cNvPr id="15" name="">
             <a:extLst xmlns:a="http://schemas.openxmlformats.org/drawingml/2006/main">
               <a:ext uri="{FF2B5EF4-FFF2-40B4-BE49-F238E27FC236}">
-                <a16:creationId xmlns:a16="http://schemas.microsoft.com/office/drawing/2014/main" id="{D6CF6B86-9E50-4BE4-96C5-3E98895DB884}"/>
+                <a16:creationId xmlns:a16="http://schemas.microsoft.com/office/drawing/2014/main" id="{6A74154A-C798-4124-A656-BEC03935165B}"/>
               </a:ext>
             </a:extLst>
           </p:cNvPr>
@@ -4026,7 +4026,7 @@
           <p:cNvPr id="16" name="">
             <a:extLst xmlns:a="http://schemas.openxmlformats.org/drawingml/2006/main">
               <a:ext uri="{FF2B5EF4-FFF2-40B4-BE49-F238E27FC236}">
-                <a16:creationId xmlns:a16="http://schemas.microsoft.com/office/drawing/2014/main" id="{27614D09-77BA-42C1-9C0A-28BB23B81514}"/>
+                <a16:creationId xmlns:a16="http://schemas.microsoft.com/office/drawing/2014/main" id="{08DC3BD9-E9C9-418B-BA59-663C9733D251}"/>
               </a:ext>
             </a:extLst>
           </p:cNvPr>
@@ -4083,7 +4083,7 @@
           <p:cNvPr id="17" name="">
             <a:extLst xmlns:a="http://schemas.openxmlformats.org/drawingml/2006/main">
               <a:ext uri="{FF2B5EF4-FFF2-40B4-BE49-F238E27FC236}">
-                <a16:creationId xmlns:a16="http://schemas.microsoft.com/office/drawing/2014/main" id="{591EA183-2856-4DB1-A4F1-521466D3FA31}"/>
+                <a16:creationId xmlns:a16="http://schemas.microsoft.com/office/drawing/2014/main" id="{18894B3E-789D-4C66-8625-ED1B4D81A075}"/>
               </a:ext>
             </a:extLst>
           </p:cNvPr>
@@ -4140,7 +4140,7 @@
           <p:cNvPr id="18" name="">
             <a:extLst xmlns:a="http://schemas.openxmlformats.org/drawingml/2006/main">
               <a:ext uri="{FF2B5EF4-FFF2-40B4-BE49-F238E27FC236}">
-                <a16:creationId xmlns:a16="http://schemas.microsoft.com/office/drawing/2014/main" id="{0EE625DA-628E-4BE6-9B89-FCB040C19102}"/>
+                <a16:creationId xmlns:a16="http://schemas.microsoft.com/office/drawing/2014/main" id="{A925CE5F-DD69-4905-B08D-B95291F0A428}"/>
               </a:ext>
             </a:extLst>
           </p:cNvPr>
@@ -4195,7 +4195,7 @@
     </p:spTree>
     <p:extLst>
       <p:ext uri="{BB962C8B-B14F-4D97-AF65-F5344CB8AC3E}">
-        <p14:creationId xmlns:p14="http://schemas.microsoft.com/office/powerpoint/2010/main" val="296330467"/>
+        <p14:creationId xmlns:p14="http://schemas.microsoft.com/office/powerpoint/2010/main" val="1739157778"/>
       </p:ext>
     </p:extLst>
   </p:cSld>
@@ -4350,7 +4350,7 @@
           <p:cNvPr id="23" name="">
             <a:extLst xmlns:a="http://schemas.openxmlformats.org/drawingml/2006/main">
               <a:ext uri="{FF2B5EF4-FFF2-40B4-BE49-F238E27FC236}">
-                <a16:creationId xmlns:a16="http://schemas.microsoft.com/office/drawing/2014/main" id="{F2A618B8-6688-4D27-87D7-3DAA4B13A538}"/>
+                <a16:creationId xmlns:a16="http://schemas.microsoft.com/office/drawing/2014/main" id="{7E7AD349-8A07-49F0-877F-E64FB60C2BBA}"/>
               </a:ext>
             </a:extLst>
           </p:cNvPr>
@@ -4382,7 +4382,7 @@
           <p:cNvPr id="2" name="">
             <a:extLst xmlns:a="http://schemas.openxmlformats.org/drawingml/2006/main">
               <a:ext uri="{FF2B5EF4-FFF2-40B4-BE49-F238E27FC236}">
-                <a16:creationId xmlns:a16="http://schemas.microsoft.com/office/drawing/2014/main" id="{55912F5D-BB53-42AB-B622-58B5DF82FFE3}"/>
+                <a16:creationId xmlns:a16="http://schemas.microsoft.com/office/drawing/2014/main" id="{2B2E3771-8A9B-47F6-A041-7B47844CD9D4}"/>
               </a:ext>
             </a:extLst>
           </p:cNvPr>
@@ -4439,7 +4439,7 @@
           <p:cNvPr id="3" name="">
             <a:extLst xmlns:a="http://schemas.openxmlformats.org/drawingml/2006/main">
               <a:ext uri="{FF2B5EF4-FFF2-40B4-BE49-F238E27FC236}">
-                <a16:creationId xmlns:a16="http://schemas.microsoft.com/office/drawing/2014/main" id="{30A298FC-2DE0-4233-AC7F-32215BCB6A19}"/>
+                <a16:creationId xmlns:a16="http://schemas.microsoft.com/office/drawing/2014/main" id="{23CB3B19-EE6C-4123-83AA-7CE19B80C015}"/>
               </a:ext>
             </a:extLst>
           </p:cNvPr>
@@ -4471,7 +4471,7 @@
           <p:cNvPr id="4" name="">
             <a:extLst xmlns:a="http://schemas.openxmlformats.org/drawingml/2006/main">
               <a:ext uri="{FF2B5EF4-FFF2-40B4-BE49-F238E27FC236}">
-                <a16:creationId xmlns:a16="http://schemas.microsoft.com/office/drawing/2014/main" id="{9E5D9948-1685-4F50-BA1D-E5B24106D9EE}"/>
+                <a16:creationId xmlns:a16="http://schemas.microsoft.com/office/drawing/2014/main" id="{6097AA6A-37CD-4259-981C-38144EC9190F}"/>
               </a:ext>
             </a:extLst>
           </p:cNvPr>
@@ -4528,7 +4528,7 @@
           <p:cNvPr id="5" name="">
             <a:extLst xmlns:a="http://schemas.openxmlformats.org/drawingml/2006/main">
               <a:ext uri="{FF2B5EF4-FFF2-40B4-BE49-F238E27FC236}">
-                <a16:creationId xmlns:a16="http://schemas.microsoft.com/office/drawing/2014/main" id="{DE0A23FE-D0A0-44E7-9629-F2F598F920C8}"/>
+                <a16:creationId xmlns:a16="http://schemas.microsoft.com/office/drawing/2014/main" id="{4F5D827F-C005-4C4F-ABE4-FC18842C7D86}"/>
               </a:ext>
             </a:extLst>
           </p:cNvPr>
@@ -4585,7 +4585,7 @@
           <p:cNvPr id="6" name="">
             <a:extLst xmlns:a="http://schemas.openxmlformats.org/drawingml/2006/main">
               <a:ext uri="{FF2B5EF4-FFF2-40B4-BE49-F238E27FC236}">
-                <a16:creationId xmlns:a16="http://schemas.microsoft.com/office/drawing/2014/main" id="{493B1B9C-2371-4733-B4B1-7506D0306F6C}"/>
+                <a16:creationId xmlns:a16="http://schemas.microsoft.com/office/drawing/2014/main" id="{88334723-97B1-44CC-921E-559197985BA0}"/>
               </a:ext>
             </a:extLst>
           </p:cNvPr>
@@ -4642,7 +4642,7 @@
           <p:cNvPr id="7" name="">
             <a:extLst xmlns:a="http://schemas.openxmlformats.org/drawingml/2006/main">
               <a:ext uri="{FF2B5EF4-FFF2-40B4-BE49-F238E27FC236}">
-                <a16:creationId xmlns:a16="http://schemas.microsoft.com/office/drawing/2014/main" id="{0E414215-E797-4F03-A4A7-E6C72F852777}"/>
+                <a16:creationId xmlns:a16="http://schemas.microsoft.com/office/drawing/2014/main" id="{48CDA78C-CB97-4EB9-86E6-51F1A39CA08E}"/>
               </a:ext>
             </a:extLst>
           </p:cNvPr>
@@ -4674,7 +4674,7 @@
           <p:cNvPr id="8" name="">
             <a:extLst xmlns:a="http://schemas.openxmlformats.org/drawingml/2006/main">
               <a:ext uri="{FF2B5EF4-FFF2-40B4-BE49-F238E27FC236}">
-                <a16:creationId xmlns:a16="http://schemas.microsoft.com/office/drawing/2014/main" id="{4C8332C5-9627-4ECA-A019-5DE30049B217}"/>
+                <a16:creationId xmlns:a16="http://schemas.microsoft.com/office/drawing/2014/main" id="{5A99D9C0-0B3C-43AE-BFE9-1672399ED561}"/>
               </a:ext>
             </a:extLst>
           </p:cNvPr>
@@ -4731,7 +4731,7 @@
           <p:cNvPr id="9" name="">
             <a:extLst xmlns:a="http://schemas.openxmlformats.org/drawingml/2006/main">
               <a:ext uri="{FF2B5EF4-FFF2-40B4-BE49-F238E27FC236}">
-                <a16:creationId xmlns:a16="http://schemas.microsoft.com/office/drawing/2014/main" id="{5CFBB2D2-7A39-42D8-A7FD-419FC7513BFB}"/>
+                <a16:creationId xmlns:a16="http://schemas.microsoft.com/office/drawing/2014/main" id="{4839978B-CAA9-428C-85B2-9CD954C6C3D3}"/>
               </a:ext>
             </a:extLst>
           </p:cNvPr>
@@ -4788,7 +4788,7 @@
           <p:cNvPr id="10" name="">
             <a:extLst xmlns:a="http://schemas.openxmlformats.org/drawingml/2006/main">
               <a:ext uri="{FF2B5EF4-FFF2-40B4-BE49-F238E27FC236}">
-                <a16:creationId xmlns:a16="http://schemas.microsoft.com/office/drawing/2014/main" id="{50BE65FC-AAB3-48B9-8C41-103C7710A735}"/>
+                <a16:creationId xmlns:a16="http://schemas.microsoft.com/office/drawing/2014/main" id="{A5BE4665-185E-44C6-B1D6-885B742D4F2C}"/>
               </a:ext>
             </a:extLst>
           </p:cNvPr>
@@ -4822,7 +4822,7 @@
           <p:cNvPr id="11" name="">
             <a:extLst xmlns:a="http://schemas.openxmlformats.org/drawingml/2006/main">
               <a:ext uri="{FF2B5EF4-FFF2-40B4-BE49-F238E27FC236}">
-                <a16:creationId xmlns:a16="http://schemas.microsoft.com/office/drawing/2014/main" id="{2BB79F28-672F-4FB3-A7A2-4E2CE5CDE868}"/>
+                <a16:creationId xmlns:a16="http://schemas.microsoft.com/office/drawing/2014/main" id="{9AA86671-D27D-4B4F-80EE-D1E676333ECC}"/>
               </a:ext>
             </a:extLst>
           </p:cNvPr>
@@ -4854,7 +4854,7 @@
           <p:cNvPr id="12" name="">
             <a:extLst xmlns:a="http://schemas.openxmlformats.org/drawingml/2006/main">
               <a:ext uri="{FF2B5EF4-FFF2-40B4-BE49-F238E27FC236}">
-                <a16:creationId xmlns:a16="http://schemas.microsoft.com/office/drawing/2014/main" id="{A6A76465-69D2-461B-9CC6-BF5AFD29B58D}"/>
+                <a16:creationId xmlns:a16="http://schemas.microsoft.com/office/drawing/2014/main" id="{472AD83B-0EAB-4CF0-B956-59C03138CB63}"/>
               </a:ext>
             </a:extLst>
           </p:cNvPr>
@@ -4911,7 +4911,7 @@
           <p:cNvPr id="13" name="">
             <a:extLst xmlns:a="http://schemas.openxmlformats.org/drawingml/2006/main">
               <a:ext uri="{FF2B5EF4-FFF2-40B4-BE49-F238E27FC236}">
-                <a16:creationId xmlns:a16="http://schemas.microsoft.com/office/drawing/2014/main" id="{8C32F75E-1DDE-4849-AF38-2D1A6C891B41}"/>
+                <a16:creationId xmlns:a16="http://schemas.microsoft.com/office/drawing/2014/main" id="{4869E74D-A685-4E39-BF9D-5CE3A58CAB1B}"/>
               </a:ext>
             </a:extLst>
           </p:cNvPr>
@@ -4968,7 +4968,7 @@
           <p:cNvPr id="14" name="">
             <a:extLst xmlns:a="http://schemas.openxmlformats.org/drawingml/2006/main">
               <a:ext uri="{FF2B5EF4-FFF2-40B4-BE49-F238E27FC236}">
-                <a16:creationId xmlns:a16="http://schemas.microsoft.com/office/drawing/2014/main" id="{DE68524C-BD6A-4BC0-8440-D2A152668EE3}"/>
+                <a16:creationId xmlns:a16="http://schemas.microsoft.com/office/drawing/2014/main" id="{B3EB7253-26E7-484B-91F6-674DC22969F0}"/>
               </a:ext>
             </a:extLst>
           </p:cNvPr>
@@ -5002,7 +5002,7 @@
           <p:cNvPr id="15" name="">
             <a:extLst xmlns:a="http://schemas.openxmlformats.org/drawingml/2006/main">
               <a:ext uri="{FF2B5EF4-FFF2-40B4-BE49-F238E27FC236}">
-                <a16:creationId xmlns:a16="http://schemas.microsoft.com/office/drawing/2014/main" id="{E74E9551-E9D5-4458-ACE6-8851867991D0}"/>
+                <a16:creationId xmlns:a16="http://schemas.microsoft.com/office/drawing/2014/main" id="{2C095D98-8395-46C7-B6B9-7D0F5E014A53}"/>
               </a:ext>
             </a:extLst>
           </p:cNvPr>
@@ -5034,7 +5034,7 @@
           <p:cNvPr id="16" name="">
             <a:extLst xmlns:a="http://schemas.openxmlformats.org/drawingml/2006/main">
               <a:ext uri="{FF2B5EF4-FFF2-40B4-BE49-F238E27FC236}">
-                <a16:creationId xmlns:a16="http://schemas.microsoft.com/office/drawing/2014/main" id="{61163D78-500F-43EB-B259-6D882DD76071}"/>
+                <a16:creationId xmlns:a16="http://schemas.microsoft.com/office/drawing/2014/main" id="{B01041B7-36CE-4E8B-85E8-90B6DC951577}"/>
               </a:ext>
             </a:extLst>
           </p:cNvPr>
@@ -5091,7 +5091,7 @@
           <p:cNvPr id="17" name="">
             <a:extLst xmlns:a="http://schemas.openxmlformats.org/drawingml/2006/main">
               <a:ext uri="{FF2B5EF4-FFF2-40B4-BE49-F238E27FC236}">
-                <a16:creationId xmlns:a16="http://schemas.microsoft.com/office/drawing/2014/main" id="{54703583-EECD-4261-BEA9-6609811C74C8}"/>
+                <a16:creationId xmlns:a16="http://schemas.microsoft.com/office/drawing/2014/main" id="{815818DB-DEED-487D-B3FC-3FCFB943D04A}"/>
               </a:ext>
             </a:extLst>
           </p:cNvPr>
@@ -5148,7 +5148,7 @@
           <p:cNvPr id="18" name="">
             <a:extLst xmlns:a="http://schemas.openxmlformats.org/drawingml/2006/main">
               <a:ext uri="{FF2B5EF4-FFF2-40B4-BE49-F238E27FC236}">
-                <a16:creationId xmlns:a16="http://schemas.microsoft.com/office/drawing/2014/main" id="{5AF614C6-D364-47B3-A9B3-DC0667D869BE}"/>
+                <a16:creationId xmlns:a16="http://schemas.microsoft.com/office/drawing/2014/main" id="{699F0468-757E-4002-A67B-444F7228BCF9}"/>
               </a:ext>
             </a:extLst>
           </p:cNvPr>
@@ -5182,7 +5182,7 @@
           <p:cNvPr id="19" name="">
             <a:extLst xmlns:a="http://schemas.openxmlformats.org/drawingml/2006/main">
               <a:ext uri="{FF2B5EF4-FFF2-40B4-BE49-F238E27FC236}">
-                <a16:creationId xmlns:a16="http://schemas.microsoft.com/office/drawing/2014/main" id="{D459EB20-3A5E-4F89-ADB9-EBDA599CFF97}"/>
+                <a16:creationId xmlns:a16="http://schemas.microsoft.com/office/drawing/2014/main" id="{F6846478-B738-4C1A-BF2A-FADA12E4F35C}"/>
               </a:ext>
             </a:extLst>
           </p:cNvPr>
@@ -5214,7 +5214,7 @@
           <p:cNvPr id="20" name="">
             <a:extLst xmlns:a="http://schemas.openxmlformats.org/drawingml/2006/main">
               <a:ext uri="{FF2B5EF4-FFF2-40B4-BE49-F238E27FC236}">
-                <a16:creationId xmlns:a16="http://schemas.microsoft.com/office/drawing/2014/main" id="{5B4621A7-A8D6-45C0-B41D-4D3DDDB18BCD}"/>
+                <a16:creationId xmlns:a16="http://schemas.microsoft.com/office/drawing/2014/main" id="{4E9BDBE3-FDEF-4B19-AEF2-1042CA164316}"/>
               </a:ext>
             </a:extLst>
           </p:cNvPr>
@@ -5271,7 +5271,7 @@
           <p:cNvPr id="21" name="">
             <a:extLst xmlns:a="http://schemas.openxmlformats.org/drawingml/2006/main">
               <a:ext uri="{FF2B5EF4-FFF2-40B4-BE49-F238E27FC236}">
-                <a16:creationId xmlns:a16="http://schemas.microsoft.com/office/drawing/2014/main" id="{890ABDB3-315C-4F96-8FEC-8690DE1526DB}"/>
+                <a16:creationId xmlns:a16="http://schemas.microsoft.com/office/drawing/2014/main" id="{BE069432-E085-49DD-A7B4-0BCC2CE57F75}"/>
               </a:ext>
             </a:extLst>
           </p:cNvPr>
@@ -5328,7 +5328,7 @@
           <p:cNvPr id="22" name="">
             <a:extLst xmlns:a="http://schemas.openxmlformats.org/drawingml/2006/main">
               <a:ext uri="{FF2B5EF4-FFF2-40B4-BE49-F238E27FC236}">
-                <a16:creationId xmlns:a16="http://schemas.microsoft.com/office/drawing/2014/main" id="{FF8D201C-D81D-414A-83F8-7DFF48690425}"/>
+                <a16:creationId xmlns:a16="http://schemas.microsoft.com/office/drawing/2014/main" id="{A25CD646-9263-47E3-B62C-C31546ACEC58}"/>
               </a:ext>
             </a:extLst>
           </p:cNvPr>
@@ -5383,7 +5383,7 @@
     </p:spTree>
     <p:extLst>
       <p:ext uri="{BB962C8B-B14F-4D97-AF65-F5344CB8AC3E}">
-        <p14:creationId xmlns:p14="http://schemas.microsoft.com/office/powerpoint/2010/main" val="1454848888"/>
+        <p14:creationId xmlns:p14="http://schemas.microsoft.com/office/powerpoint/2010/main" val="668007145"/>
       </p:ext>
     </p:extLst>
   </p:cSld>
@@ -5584,7 +5584,7 @@
           <p:cNvPr id="23" name="">
             <a:extLst xmlns:a="http://schemas.openxmlformats.org/drawingml/2006/main">
               <a:ext uri="{FF2B5EF4-FFF2-40B4-BE49-F238E27FC236}">
-                <a16:creationId xmlns:a16="http://schemas.microsoft.com/office/drawing/2014/main" id="{EBBC7261-AFF4-4073-8818-822E4472C45A}"/>
+                <a16:creationId xmlns:a16="http://schemas.microsoft.com/office/drawing/2014/main" id="{D9D26CD3-5946-493C-BABA-74D6B9E0A35D}"/>
               </a:ext>
             </a:extLst>
           </p:cNvPr>
@@ -5616,7 +5616,7 @@
           <p:cNvPr id="2" name="">
             <a:extLst xmlns:a="http://schemas.openxmlformats.org/drawingml/2006/main">
               <a:ext uri="{FF2B5EF4-FFF2-40B4-BE49-F238E27FC236}">
-                <a16:creationId xmlns:a16="http://schemas.microsoft.com/office/drawing/2014/main" id="{4380410E-1426-4641-BADB-84935A31A3D1}"/>
+                <a16:creationId xmlns:a16="http://schemas.microsoft.com/office/drawing/2014/main" id="{6B5410C4-D321-4299-9D56-46A5753AF779}"/>
               </a:ext>
             </a:extLst>
           </p:cNvPr>
@@ -5673,7 +5673,7 @@
           <p:cNvPr id="3" name="">
             <a:extLst xmlns:a="http://schemas.openxmlformats.org/drawingml/2006/main">
               <a:ext uri="{FF2B5EF4-FFF2-40B4-BE49-F238E27FC236}">
-                <a16:creationId xmlns:a16="http://schemas.microsoft.com/office/drawing/2014/main" id="{D9FD83CB-BE3F-4FA3-9BEE-84541C3B3C3A}"/>
+                <a16:creationId xmlns:a16="http://schemas.microsoft.com/office/drawing/2014/main" id="{6F693899-73FC-4937-BACD-2B40763EE493}"/>
               </a:ext>
             </a:extLst>
           </p:cNvPr>
@@ -5705,7 +5705,7 @@
           <p:cNvPr id="4" name="">
             <a:extLst xmlns:a="http://schemas.openxmlformats.org/drawingml/2006/main">
               <a:ext uri="{FF2B5EF4-FFF2-40B4-BE49-F238E27FC236}">
-                <a16:creationId xmlns:a16="http://schemas.microsoft.com/office/drawing/2014/main" id="{AB7ED765-67E2-4F7C-9246-B33FCDF14240}"/>
+                <a16:creationId xmlns:a16="http://schemas.microsoft.com/office/drawing/2014/main" id="{EF65748F-0E8A-4F72-9D55-9D310C5AF9AC}"/>
               </a:ext>
             </a:extLst>
           </p:cNvPr>
@@ -5762,7 +5762,7 @@
           <p:cNvPr id="5" name="">
             <a:extLst xmlns:a="http://schemas.openxmlformats.org/drawingml/2006/main">
               <a:ext uri="{FF2B5EF4-FFF2-40B4-BE49-F238E27FC236}">
-                <a16:creationId xmlns:a16="http://schemas.microsoft.com/office/drawing/2014/main" id="{55BC9E2E-291D-472A-B32D-62DD5EB015B6}"/>
+                <a16:creationId xmlns:a16="http://schemas.microsoft.com/office/drawing/2014/main" id="{A5E5160A-ABAA-47BD-A7EB-47FE9686912A}"/>
               </a:ext>
             </a:extLst>
           </p:cNvPr>
@@ -5819,7 +5819,7 @@
           <p:cNvPr id="6" name="">
             <a:extLst xmlns:a="http://schemas.openxmlformats.org/drawingml/2006/main">
               <a:ext uri="{FF2B5EF4-FFF2-40B4-BE49-F238E27FC236}">
-                <a16:creationId xmlns:a16="http://schemas.microsoft.com/office/drawing/2014/main" id="{31CB4CEB-03F3-4F69-AC0E-81F8756517A9}"/>
+                <a16:creationId xmlns:a16="http://schemas.microsoft.com/office/drawing/2014/main" id="{5EC3AD6C-9E43-444F-8D0C-77A35376E20A}"/>
               </a:ext>
             </a:extLst>
           </p:cNvPr>
@@ -5876,7 +5876,7 @@
           <p:cNvPr id="7" name="">
             <a:extLst xmlns:a="http://schemas.openxmlformats.org/drawingml/2006/main">
               <a:ext uri="{FF2B5EF4-FFF2-40B4-BE49-F238E27FC236}">
-                <a16:creationId xmlns:a16="http://schemas.microsoft.com/office/drawing/2014/main" id="{9F6A1893-938D-4755-BF5D-A56A8ED9FA2B}"/>
+                <a16:creationId xmlns:a16="http://schemas.microsoft.com/office/drawing/2014/main" id="{88126040-AD78-48FC-B77F-A27F16085042}"/>
               </a:ext>
             </a:extLst>
           </p:cNvPr>
@@ -5908,7 +5908,7 @@
           <p:cNvPr id="8" name="">
             <a:extLst xmlns:a="http://schemas.openxmlformats.org/drawingml/2006/main">
               <a:ext uri="{FF2B5EF4-FFF2-40B4-BE49-F238E27FC236}">
-                <a16:creationId xmlns:a16="http://schemas.microsoft.com/office/drawing/2014/main" id="{EBF991B0-E5E2-4278-B251-CF229DB6398B}"/>
+                <a16:creationId xmlns:a16="http://schemas.microsoft.com/office/drawing/2014/main" id="{555755D2-CA91-4C1D-9560-A078C16B90A7}"/>
               </a:ext>
             </a:extLst>
           </p:cNvPr>
@@ -5965,7 +5965,7 @@
           <p:cNvPr id="9" name="">
             <a:extLst xmlns:a="http://schemas.openxmlformats.org/drawingml/2006/main">
               <a:ext uri="{FF2B5EF4-FFF2-40B4-BE49-F238E27FC236}">
-                <a16:creationId xmlns:a16="http://schemas.microsoft.com/office/drawing/2014/main" id="{F901F01A-97FD-481E-8341-2B3BDCBA93D9}"/>
+                <a16:creationId xmlns:a16="http://schemas.microsoft.com/office/drawing/2014/main" id="{0453569F-20A8-42A1-8C37-018BE14E8E3F}"/>
               </a:ext>
             </a:extLst>
           </p:cNvPr>
@@ -6022,7 +6022,7 @@
           <p:cNvPr id="10" name="">
             <a:extLst xmlns:a="http://schemas.openxmlformats.org/drawingml/2006/main">
               <a:ext uri="{FF2B5EF4-FFF2-40B4-BE49-F238E27FC236}">
-                <a16:creationId xmlns:a16="http://schemas.microsoft.com/office/drawing/2014/main" id="{1A820956-E190-4956-8E95-D02EBAD235C1}"/>
+                <a16:creationId xmlns:a16="http://schemas.microsoft.com/office/drawing/2014/main" id="{163D2C83-87C5-4C18-9BF8-1CC6D5057DF0}"/>
               </a:ext>
             </a:extLst>
           </p:cNvPr>
@@ -6056,7 +6056,7 @@
           <p:cNvPr id="11" name="">
             <a:extLst xmlns:a="http://schemas.openxmlformats.org/drawingml/2006/main">
               <a:ext uri="{FF2B5EF4-FFF2-40B4-BE49-F238E27FC236}">
-                <a16:creationId xmlns:a16="http://schemas.microsoft.com/office/drawing/2014/main" id="{8DC4B5D8-A8DE-4D2D-A1ED-8203BD6E459E}"/>
+                <a16:creationId xmlns:a16="http://schemas.microsoft.com/office/drawing/2014/main" id="{34BC2F07-8FE0-457B-83B5-E76650FFB532}"/>
               </a:ext>
             </a:extLst>
           </p:cNvPr>
@@ -6088,7 +6088,7 @@
           <p:cNvPr id="12" name="">
             <a:extLst xmlns:a="http://schemas.openxmlformats.org/drawingml/2006/main">
               <a:ext uri="{FF2B5EF4-FFF2-40B4-BE49-F238E27FC236}">
-                <a16:creationId xmlns:a16="http://schemas.microsoft.com/office/drawing/2014/main" id="{BE63385F-4109-4AC1-B6F2-9BF4857A1831}"/>
+                <a16:creationId xmlns:a16="http://schemas.microsoft.com/office/drawing/2014/main" id="{33F59DFA-4612-4411-B49E-B774E0EAD4C5}"/>
               </a:ext>
             </a:extLst>
           </p:cNvPr>
@@ -6145,7 +6145,7 @@
           <p:cNvPr id="13" name="">
             <a:extLst xmlns:a="http://schemas.openxmlformats.org/drawingml/2006/main">
               <a:ext uri="{FF2B5EF4-FFF2-40B4-BE49-F238E27FC236}">
-                <a16:creationId xmlns:a16="http://schemas.microsoft.com/office/drawing/2014/main" id="{ACBEFCFE-C91A-4548-BA5A-94CBAC4526CF}"/>
+                <a16:creationId xmlns:a16="http://schemas.microsoft.com/office/drawing/2014/main" id="{F0FD20C9-29F9-4BE4-B873-3F36C5B62DC7}"/>
               </a:ext>
             </a:extLst>
           </p:cNvPr>
@@ -6202,7 +6202,7 @@
           <p:cNvPr id="14" name="">
             <a:extLst xmlns:a="http://schemas.openxmlformats.org/drawingml/2006/main">
               <a:ext uri="{FF2B5EF4-FFF2-40B4-BE49-F238E27FC236}">
-                <a16:creationId xmlns:a16="http://schemas.microsoft.com/office/drawing/2014/main" id="{C25209C8-012B-4EC1-83EE-253708FBFCDE}"/>
+                <a16:creationId xmlns:a16="http://schemas.microsoft.com/office/drawing/2014/main" id="{650192C0-D390-45D1-A443-D4450AFCD42B}"/>
               </a:ext>
             </a:extLst>
           </p:cNvPr>
@@ -6236,7 +6236,7 @@
           <p:cNvPr id="15" name="">
             <a:extLst xmlns:a="http://schemas.openxmlformats.org/drawingml/2006/main">
               <a:ext uri="{FF2B5EF4-FFF2-40B4-BE49-F238E27FC236}">
-                <a16:creationId xmlns:a16="http://schemas.microsoft.com/office/drawing/2014/main" id="{666B1C56-72D5-4CA6-AD49-4CF83FE35745}"/>
+                <a16:creationId xmlns:a16="http://schemas.microsoft.com/office/drawing/2014/main" id="{C57E8220-62A1-4542-B9A9-8DF344EA80A4}"/>
               </a:ext>
             </a:extLst>
           </p:cNvPr>
@@ -6268,7 +6268,7 @@
           <p:cNvPr id="16" name="">
             <a:extLst xmlns:a="http://schemas.openxmlformats.org/drawingml/2006/main">
               <a:ext uri="{FF2B5EF4-FFF2-40B4-BE49-F238E27FC236}">
-                <a16:creationId xmlns:a16="http://schemas.microsoft.com/office/drawing/2014/main" id="{80ED7498-AAFB-44B8-8493-5C15738F000D}"/>
+                <a16:creationId xmlns:a16="http://schemas.microsoft.com/office/drawing/2014/main" id="{41A06EB1-3F4E-429E-BD45-59A15AC30789}"/>
               </a:ext>
             </a:extLst>
           </p:cNvPr>
@@ -6325,7 +6325,7 @@
           <p:cNvPr id="17" name="">
             <a:extLst xmlns:a="http://schemas.openxmlformats.org/drawingml/2006/main">
               <a:ext uri="{FF2B5EF4-FFF2-40B4-BE49-F238E27FC236}">
-                <a16:creationId xmlns:a16="http://schemas.microsoft.com/office/drawing/2014/main" id="{F5367F77-D3D0-4FBC-9C88-A682F72DD8BA}"/>
+                <a16:creationId xmlns:a16="http://schemas.microsoft.com/office/drawing/2014/main" id="{451F2594-DE4E-441B-9D22-2364E12D9EE1}"/>
               </a:ext>
             </a:extLst>
           </p:cNvPr>
@@ -6382,7 +6382,7 @@
           <p:cNvPr id="18" name="">
             <a:extLst xmlns:a="http://schemas.openxmlformats.org/drawingml/2006/main">
               <a:ext uri="{FF2B5EF4-FFF2-40B4-BE49-F238E27FC236}">
-                <a16:creationId xmlns:a16="http://schemas.microsoft.com/office/drawing/2014/main" id="{CBC766DA-0D20-4424-9875-FBB8529BC0FD}"/>
+                <a16:creationId xmlns:a16="http://schemas.microsoft.com/office/drawing/2014/main" id="{EE2513A2-BAE0-4975-B505-A7E415395E0D}"/>
               </a:ext>
             </a:extLst>
           </p:cNvPr>
@@ -6416,7 +6416,7 @@
           <p:cNvPr id="19" name="">
             <a:extLst xmlns:a="http://schemas.openxmlformats.org/drawingml/2006/main">
               <a:ext uri="{FF2B5EF4-FFF2-40B4-BE49-F238E27FC236}">
-                <a16:creationId xmlns:a16="http://schemas.microsoft.com/office/drawing/2014/main" id="{D6417D59-AAA0-4642-9EC8-8B9819AC3A55}"/>
+                <a16:creationId xmlns:a16="http://schemas.microsoft.com/office/drawing/2014/main" id="{33926F85-9A18-4E06-B8AF-D26073F4D186}"/>
               </a:ext>
             </a:extLst>
           </p:cNvPr>
@@ -6448,7 +6448,7 @@
           <p:cNvPr id="20" name="">
             <a:extLst xmlns:a="http://schemas.openxmlformats.org/drawingml/2006/main">
               <a:ext uri="{FF2B5EF4-FFF2-40B4-BE49-F238E27FC236}">
-                <a16:creationId xmlns:a16="http://schemas.microsoft.com/office/drawing/2014/main" id="{3DDFF3AC-B0B1-4BA1-AA3E-5B3BC7BE1552}"/>
+                <a16:creationId xmlns:a16="http://schemas.microsoft.com/office/drawing/2014/main" id="{315E75BD-75E7-42DD-A7E6-D33358237AC7}"/>
               </a:ext>
             </a:extLst>
           </p:cNvPr>
@@ -6505,7 +6505,7 @@
           <p:cNvPr id="21" name="">
             <a:extLst xmlns:a="http://schemas.openxmlformats.org/drawingml/2006/main">
               <a:ext uri="{FF2B5EF4-FFF2-40B4-BE49-F238E27FC236}">
-                <a16:creationId xmlns:a16="http://schemas.microsoft.com/office/drawing/2014/main" id="{119A2EDB-3999-4E73-BF61-C0266C419309}"/>
+                <a16:creationId xmlns:a16="http://schemas.microsoft.com/office/drawing/2014/main" id="{192EAD5D-7BF3-4883-A798-D19D2F664EBC}"/>
               </a:ext>
             </a:extLst>
           </p:cNvPr>
@@ -6562,7 +6562,7 @@
           <p:cNvPr id="22" name="">
             <a:extLst xmlns:a="http://schemas.openxmlformats.org/drawingml/2006/main">
               <a:ext uri="{FF2B5EF4-FFF2-40B4-BE49-F238E27FC236}">
-                <a16:creationId xmlns:a16="http://schemas.microsoft.com/office/drawing/2014/main" id="{0AD41387-E427-4E70-A065-F71C4748EE55}"/>
+                <a16:creationId xmlns:a16="http://schemas.microsoft.com/office/drawing/2014/main" id="{4AF03669-5810-4D24-84C7-37C66FD51841}"/>
               </a:ext>
             </a:extLst>
           </p:cNvPr>
@@ -6617,7 +6617,7 @@
     </p:spTree>
     <p:extLst>
       <p:ext uri="{BB962C8B-B14F-4D97-AF65-F5344CB8AC3E}">
-        <p14:creationId xmlns:p14="http://schemas.microsoft.com/office/powerpoint/2010/main" val="1210875237"/>
+        <p14:creationId xmlns:p14="http://schemas.microsoft.com/office/powerpoint/2010/main" val="643842198"/>
       </p:ext>
     </p:extLst>
   </p:cSld>
@@ -6818,7 +6818,7 @@
           <p:cNvPr id="16" name="">
             <a:extLst xmlns:a="http://schemas.openxmlformats.org/drawingml/2006/main">
               <a:ext uri="{FF2B5EF4-FFF2-40B4-BE49-F238E27FC236}">
-                <a16:creationId xmlns:a16="http://schemas.microsoft.com/office/drawing/2014/main" id="{196A4D7E-853B-47DA-9091-92AE9FEC9B0D}"/>
+                <a16:creationId xmlns:a16="http://schemas.microsoft.com/office/drawing/2014/main" id="{069BD31E-7C12-4AAD-8F5A-73E5DC434E1B}"/>
               </a:ext>
             </a:extLst>
           </p:cNvPr>
@@ -6850,7 +6850,7 @@
           <p:cNvPr id="2" name="">
             <a:extLst xmlns:a="http://schemas.openxmlformats.org/drawingml/2006/main">
               <a:ext uri="{FF2B5EF4-FFF2-40B4-BE49-F238E27FC236}">
-                <a16:creationId xmlns:a16="http://schemas.microsoft.com/office/drawing/2014/main" id="{6318B7BA-9AA5-4974-A7A6-53FF58C2D2F8}"/>
+                <a16:creationId xmlns:a16="http://schemas.microsoft.com/office/drawing/2014/main" id="{D5369BD1-A6D2-454F-9979-2C96582093B4}"/>
               </a:ext>
             </a:extLst>
           </p:cNvPr>
@@ -6907,7 +6907,7 @@
           <p:cNvPr id="3" name="">
             <a:extLst xmlns:a="http://schemas.openxmlformats.org/drawingml/2006/main">
               <a:ext uri="{FF2B5EF4-FFF2-40B4-BE49-F238E27FC236}">
-                <a16:creationId xmlns:a16="http://schemas.microsoft.com/office/drawing/2014/main" id="{56914F09-4185-4A03-9B01-D62D56CF4472}"/>
+                <a16:creationId xmlns:a16="http://schemas.microsoft.com/office/drawing/2014/main" id="{C2317081-8E1C-491D-8F72-AA9CEB0EEBA4}"/>
               </a:ext>
             </a:extLst>
           </p:cNvPr>
@@ -6939,7 +6939,7 @@
           <p:cNvPr id="4" name="">
             <a:extLst xmlns:a="http://schemas.openxmlformats.org/drawingml/2006/main">
               <a:ext uri="{FF2B5EF4-FFF2-40B4-BE49-F238E27FC236}">
-                <a16:creationId xmlns:a16="http://schemas.microsoft.com/office/drawing/2014/main" id="{E3AB9203-B703-40A0-874E-ACEAC9F8C978}"/>
+                <a16:creationId xmlns:a16="http://schemas.microsoft.com/office/drawing/2014/main" id="{57E1BA71-E898-439E-B49D-377CA97C0607}"/>
               </a:ext>
             </a:extLst>
           </p:cNvPr>
@@ -6996,7 +6996,7 @@
           <p:cNvPr id="5" name="">
             <a:extLst xmlns:a="http://schemas.openxmlformats.org/drawingml/2006/main">
               <a:ext uri="{FF2B5EF4-FFF2-40B4-BE49-F238E27FC236}">
-                <a16:creationId xmlns:a16="http://schemas.microsoft.com/office/drawing/2014/main" id="{CFDCAB6D-5B7C-4C40-AF9A-6B831E4B7485}"/>
+                <a16:creationId xmlns:a16="http://schemas.microsoft.com/office/drawing/2014/main" id="{F5B29E5F-7B0A-4078-A723-84E511C316D4}"/>
               </a:ext>
             </a:extLst>
           </p:cNvPr>
@@ -7053,7 +7053,7 @@
           <p:cNvPr id="6" name="">
             <a:extLst xmlns:a="http://schemas.openxmlformats.org/drawingml/2006/main">
               <a:ext uri="{FF2B5EF4-FFF2-40B4-BE49-F238E27FC236}">
-                <a16:creationId xmlns:a16="http://schemas.microsoft.com/office/drawing/2014/main" id="{78FB4EB6-5D60-4438-B760-631B3438EB18}"/>
+                <a16:creationId xmlns:a16="http://schemas.microsoft.com/office/drawing/2014/main" id="{C7724ADC-68A1-4CBD-8DE8-7399D7D7728E}"/>
               </a:ext>
             </a:extLst>
           </p:cNvPr>
@@ -7110,7 +7110,7 @@
           <p:cNvPr id="7" name="">
             <a:extLst xmlns:a="http://schemas.openxmlformats.org/drawingml/2006/main">
               <a:ext uri="{FF2B5EF4-FFF2-40B4-BE49-F238E27FC236}">
-                <a16:creationId xmlns:a16="http://schemas.microsoft.com/office/drawing/2014/main" id="{F462626F-3F65-43F8-81F8-A63AE0665430}"/>
+                <a16:creationId xmlns:a16="http://schemas.microsoft.com/office/drawing/2014/main" id="{32642348-D07E-43EC-B05A-C2B792E343FC}"/>
               </a:ext>
             </a:extLst>
           </p:cNvPr>
@@ -7142,7 +7142,7 @@
           <p:cNvPr id="8" name="">
             <a:extLst xmlns:a="http://schemas.openxmlformats.org/drawingml/2006/main">
               <a:ext uri="{FF2B5EF4-FFF2-40B4-BE49-F238E27FC236}">
-                <a16:creationId xmlns:a16="http://schemas.microsoft.com/office/drawing/2014/main" id="{A5A12A9B-9832-4B20-9FF1-23520A682374}"/>
+                <a16:creationId xmlns:a16="http://schemas.microsoft.com/office/drawing/2014/main" id="{6CFCDD11-3E35-4D2C-A2CA-7D1597849B53}"/>
               </a:ext>
             </a:extLst>
           </p:cNvPr>
@@ -7199,7 +7199,7 @@
           <p:cNvPr id="9" name="">
             <a:extLst xmlns:a="http://schemas.openxmlformats.org/drawingml/2006/main">
               <a:ext uri="{FF2B5EF4-FFF2-40B4-BE49-F238E27FC236}">
-                <a16:creationId xmlns:a16="http://schemas.microsoft.com/office/drawing/2014/main" id="{A54BB500-4CCC-4472-BDF2-C07AAAFBECF5}"/>
+                <a16:creationId xmlns:a16="http://schemas.microsoft.com/office/drawing/2014/main" id="{782ED910-4A0E-49FC-B8F5-87A112EA564B}"/>
               </a:ext>
             </a:extLst>
           </p:cNvPr>
@@ -7256,7 +7256,7 @@
           <p:cNvPr id="10" name="">
             <a:extLst xmlns:a="http://schemas.openxmlformats.org/drawingml/2006/main">
               <a:ext uri="{FF2B5EF4-FFF2-40B4-BE49-F238E27FC236}">
-                <a16:creationId xmlns:a16="http://schemas.microsoft.com/office/drawing/2014/main" id="{24B34128-3E1B-41CD-9205-9265085DB733}"/>
+                <a16:creationId xmlns:a16="http://schemas.microsoft.com/office/drawing/2014/main" id="{1E2EF400-AE41-4E43-97C5-293429DBD19D}"/>
               </a:ext>
             </a:extLst>
           </p:cNvPr>
@@ -7313,7 +7313,7 @@
           <p:cNvPr id="11" name="">
             <a:extLst xmlns:a="http://schemas.openxmlformats.org/drawingml/2006/main">
               <a:ext uri="{FF2B5EF4-FFF2-40B4-BE49-F238E27FC236}">
-                <a16:creationId xmlns:a16="http://schemas.microsoft.com/office/drawing/2014/main" id="{2B4E6AD2-435F-48BA-B094-2889DAA76140}"/>
+                <a16:creationId xmlns:a16="http://schemas.microsoft.com/office/drawing/2014/main" id="{CBD7BA3C-6EC6-4175-9CB5-5F5B86175C7B}"/>
               </a:ext>
             </a:extLst>
           </p:cNvPr>
@@ -7345,7 +7345,7 @@
           <p:cNvPr id="12" name="">
             <a:extLst xmlns:a="http://schemas.openxmlformats.org/drawingml/2006/main">
               <a:ext uri="{FF2B5EF4-FFF2-40B4-BE49-F238E27FC236}">
-                <a16:creationId xmlns:a16="http://schemas.microsoft.com/office/drawing/2014/main" id="{931C7A43-0313-4FC7-9EBE-C0B1B7A7840B}"/>
+                <a16:creationId xmlns:a16="http://schemas.microsoft.com/office/drawing/2014/main" id="{9FAAE174-7E48-409A-9D4E-485EA01408DF}"/>
               </a:ext>
             </a:extLst>
           </p:cNvPr>
@@ -7402,7 +7402,7 @@
           <p:cNvPr id="13" name="">
             <a:extLst xmlns:a="http://schemas.openxmlformats.org/drawingml/2006/main">
               <a:ext uri="{FF2B5EF4-FFF2-40B4-BE49-F238E27FC236}">
-                <a16:creationId xmlns:a16="http://schemas.microsoft.com/office/drawing/2014/main" id="{5825B0E9-1A1A-46E0-A86C-EE14405C3826}"/>
+                <a16:creationId xmlns:a16="http://schemas.microsoft.com/office/drawing/2014/main" id="{BA282201-5158-41F5-BE3A-47465535C01C}"/>
               </a:ext>
             </a:extLst>
           </p:cNvPr>
@@ -7459,7 +7459,7 @@
           <p:cNvPr id="14" name="">
             <a:extLst xmlns:a="http://schemas.openxmlformats.org/drawingml/2006/main">
               <a:ext uri="{FF2B5EF4-FFF2-40B4-BE49-F238E27FC236}">
-                <a16:creationId xmlns:a16="http://schemas.microsoft.com/office/drawing/2014/main" id="{72D0EF13-F777-4596-B098-9BD70D359129}"/>
+                <a16:creationId xmlns:a16="http://schemas.microsoft.com/office/drawing/2014/main" id="{3CA667B7-8797-4AB7-80BE-E3B1CF541E41}"/>
               </a:ext>
             </a:extLst>
           </p:cNvPr>
@@ -7516,7 +7516,7 @@
           <p:cNvPr id="15" name="">
             <a:extLst xmlns:a="http://schemas.openxmlformats.org/drawingml/2006/main">
               <a:ext uri="{FF2B5EF4-FFF2-40B4-BE49-F238E27FC236}">
-                <a16:creationId xmlns:a16="http://schemas.microsoft.com/office/drawing/2014/main" id="{AE2CEA81-1BD6-4FE1-9ABF-8584DC4DB36B}"/>
+                <a16:creationId xmlns:a16="http://schemas.microsoft.com/office/drawing/2014/main" id="{E60DBDA4-CF90-4DF9-9A47-1ACBF1510523}"/>
               </a:ext>
             </a:extLst>
           </p:cNvPr>
@@ -7571,7 +7571,7 @@
     </p:spTree>
     <p:extLst>
       <p:ext uri="{BB962C8B-B14F-4D97-AF65-F5344CB8AC3E}">
-        <p14:creationId xmlns:p14="http://schemas.microsoft.com/office/powerpoint/2010/main" val="1479234176"/>
+        <p14:creationId xmlns:p14="http://schemas.microsoft.com/office/powerpoint/2010/main" val="1442772469"/>
       </p:ext>
     </p:extLst>
   </p:cSld>
@@ -7772,7 +7772,7 @@
           <p:cNvPr id="23" name="">
             <a:extLst xmlns:a="http://schemas.openxmlformats.org/drawingml/2006/main">
               <a:ext uri="{FF2B5EF4-FFF2-40B4-BE49-F238E27FC236}">
-                <a16:creationId xmlns:a16="http://schemas.microsoft.com/office/drawing/2014/main" id="{A4E98B34-A25A-4F21-B123-4D256E379EB9}"/>
+                <a16:creationId xmlns:a16="http://schemas.microsoft.com/office/drawing/2014/main" id="{1F3D0ABC-C27E-45CE-A7BA-A5EC79F01C29}"/>
               </a:ext>
             </a:extLst>
           </p:cNvPr>
@@ -7804,7 +7804,7 @@
           <p:cNvPr id="2" name="">
             <a:extLst xmlns:a="http://schemas.openxmlformats.org/drawingml/2006/main">
               <a:ext uri="{FF2B5EF4-FFF2-40B4-BE49-F238E27FC236}">
-                <a16:creationId xmlns:a16="http://schemas.microsoft.com/office/drawing/2014/main" id="{14292E21-9337-4D27-9EC0-8F57D1CA88EC}"/>
+                <a16:creationId xmlns:a16="http://schemas.microsoft.com/office/drawing/2014/main" id="{0E466ADA-3D57-4933-8EBD-C71456114315}"/>
               </a:ext>
             </a:extLst>
           </p:cNvPr>
@@ -7861,7 +7861,7 @@
           <p:cNvPr id="3" name="">
             <a:extLst xmlns:a="http://schemas.openxmlformats.org/drawingml/2006/main">
               <a:ext uri="{FF2B5EF4-FFF2-40B4-BE49-F238E27FC236}">
-                <a16:creationId xmlns:a16="http://schemas.microsoft.com/office/drawing/2014/main" id="{F2C689D1-4383-4531-A7DF-D615A9C4DA1E}"/>
+                <a16:creationId xmlns:a16="http://schemas.microsoft.com/office/drawing/2014/main" id="{9820BC83-7172-4555-8F27-40485009F3FB}"/>
               </a:ext>
             </a:extLst>
           </p:cNvPr>
@@ -7893,7 +7893,7 @@
           <p:cNvPr id="4" name="">
             <a:extLst xmlns:a="http://schemas.openxmlformats.org/drawingml/2006/main">
               <a:ext uri="{FF2B5EF4-FFF2-40B4-BE49-F238E27FC236}">
-                <a16:creationId xmlns:a16="http://schemas.microsoft.com/office/drawing/2014/main" id="{9970F4A4-CF3C-41D8-A69D-62B49E553778}"/>
+                <a16:creationId xmlns:a16="http://schemas.microsoft.com/office/drawing/2014/main" id="{45A2B493-50A6-495F-8C02-59D65006DA00}"/>
               </a:ext>
             </a:extLst>
           </p:cNvPr>
@@ -7950,7 +7950,7 @@
           <p:cNvPr id="5" name="">
             <a:extLst xmlns:a="http://schemas.openxmlformats.org/drawingml/2006/main">
               <a:ext uri="{FF2B5EF4-FFF2-40B4-BE49-F238E27FC236}">
-                <a16:creationId xmlns:a16="http://schemas.microsoft.com/office/drawing/2014/main" id="{9A43D0F0-30F8-4693-B8A8-F2E6512F8763}"/>
+                <a16:creationId xmlns:a16="http://schemas.microsoft.com/office/drawing/2014/main" id="{BB507761-227B-432D-A515-6C83D2AC48AE}"/>
               </a:ext>
             </a:extLst>
           </p:cNvPr>
@@ -8007,7 +8007,7 @@
           <p:cNvPr id="6" name="">
             <a:extLst xmlns:a="http://schemas.openxmlformats.org/drawingml/2006/main">
               <a:ext uri="{FF2B5EF4-FFF2-40B4-BE49-F238E27FC236}">
-                <a16:creationId xmlns:a16="http://schemas.microsoft.com/office/drawing/2014/main" id="{1B94E331-BC41-47EF-919F-B1A6A8A19459}"/>
+                <a16:creationId xmlns:a16="http://schemas.microsoft.com/office/drawing/2014/main" id="{ACC30872-1743-4208-A7D1-CA06AAEB1145}"/>
               </a:ext>
             </a:extLst>
           </p:cNvPr>
@@ -8064,7 +8064,7 @@
           <p:cNvPr id="7" name="">
             <a:extLst xmlns:a="http://schemas.openxmlformats.org/drawingml/2006/main">
               <a:ext uri="{FF2B5EF4-FFF2-40B4-BE49-F238E27FC236}">
-                <a16:creationId xmlns:a16="http://schemas.microsoft.com/office/drawing/2014/main" id="{8E9EB7D7-BBAD-4132-B9A1-518F54673F26}"/>
+                <a16:creationId xmlns:a16="http://schemas.microsoft.com/office/drawing/2014/main" id="{4B70B3CE-63B7-47EC-BD76-FF426AE1C22E}"/>
               </a:ext>
             </a:extLst>
           </p:cNvPr>
@@ -8096,7 +8096,7 @@
           <p:cNvPr id="8" name="">
             <a:extLst xmlns:a="http://schemas.openxmlformats.org/drawingml/2006/main">
               <a:ext uri="{FF2B5EF4-FFF2-40B4-BE49-F238E27FC236}">
-                <a16:creationId xmlns:a16="http://schemas.microsoft.com/office/drawing/2014/main" id="{516904D8-8392-47DA-8E8E-A20B41EEF095}"/>
+                <a16:creationId xmlns:a16="http://schemas.microsoft.com/office/drawing/2014/main" id="{9ECF7E1F-6B94-4896-B451-DA86F4FC6C84}"/>
               </a:ext>
             </a:extLst>
           </p:cNvPr>
@@ -8153,7 +8153,7 @@
           <p:cNvPr id="9" name="">
             <a:extLst xmlns:a="http://schemas.openxmlformats.org/drawingml/2006/main">
               <a:ext uri="{FF2B5EF4-FFF2-40B4-BE49-F238E27FC236}">
-                <a16:creationId xmlns:a16="http://schemas.microsoft.com/office/drawing/2014/main" id="{E0D32C35-D1E9-4B02-93E4-1EE8A3654D8A}"/>
+                <a16:creationId xmlns:a16="http://schemas.microsoft.com/office/drawing/2014/main" id="{B424313C-193D-4404-ACF4-DFD63E06B918}"/>
               </a:ext>
             </a:extLst>
           </p:cNvPr>
@@ -8210,19 +8210,19 @@
           <p:cNvPr id="10" name="">
             <a:extLst xmlns:a="http://schemas.openxmlformats.org/drawingml/2006/main">
               <a:ext uri="{FF2B5EF4-FFF2-40B4-BE49-F238E27FC236}">
-                <a16:creationId xmlns:a16="http://schemas.microsoft.com/office/drawing/2014/main" id="{97D1DF03-E710-4B51-845D-21C42B9DCD80}"/>
-              </a:ext>
-            </a:extLst>
-          </p:cNvPr>
-          <p:cNvSpPr>
-            <a:spLocks xmlns:a="http://schemas.openxmlformats.org/drawingml/2006/main" noGrp="1"/>
-          </p:cNvSpPr>
-          <p:nvPr/>
-        </p:nvSpPr>
-        <p:spPr>
-          <a:xfrm xmlns:a="http://schemas.openxmlformats.org/drawingml/2006/main">
-            <a:off x="914400" y="1257300"/>
-            <a:ext cx="10363200" cy="781050"/>
+                <a16:creationId xmlns:a16="http://schemas.microsoft.com/office/drawing/2014/main" id="{88024563-998C-478C-8D8C-07934C5C4F1A}"/>
+              </a:ext>
+            </a:extLst>
+          </p:cNvPr>
+          <p:cNvSpPr>
+            <a:spLocks xmlns:a="http://schemas.openxmlformats.org/drawingml/2006/main" noGrp="1"/>
+          </p:cNvSpPr>
+          <p:nvPr/>
+        </p:nvSpPr>
+        <p:spPr>
+          <a:xfrm xmlns:a="http://schemas.openxmlformats.org/drawingml/2006/main">
+            <a:off x="857250" y="1219200"/>
+            <a:ext cx="10477500" cy="742950"/>
           </a:xfrm>
           <a:prstGeom xmlns:a="http://schemas.openxmlformats.org/drawingml/2006/main" prst="rect">
             <a:avLst/>
@@ -8239,7 +8239,7 @@
           <a:lstStyle xmlns:a="http://schemas.openxmlformats.org/drawingml/2006/main"/>
           <a:p xmlns:a="http://schemas.openxmlformats.org/drawingml/2006/main">
             <a:pPr algn="ctr">
-              <a:defRPr sz="2175" b="1">
+              <a:defRPr sz="2100" b="1">
                 <a:solidFill>
                   <a:srgbClr val="17253A"/>
                 </a:solidFill>
@@ -8249,7 +8249,7 @@
               </a:defRPr>
             </a:pPr>
             <a:r>
-              <a:rPr sz="2175" b="1">
+              <a:rPr sz="2100" b="1">
                 <a:solidFill>
                   <a:srgbClr val="17253A"/>
                 </a:solidFill>
@@ -8267,28 +8267,30 @@
           <p:cNvPr id="11" name="">
             <a:extLst xmlns:a="http://schemas.openxmlformats.org/drawingml/2006/main">
               <a:ext uri="{FF2B5EF4-FFF2-40B4-BE49-F238E27FC236}">
-                <a16:creationId xmlns:a16="http://schemas.microsoft.com/office/drawing/2014/main" id="{516F5463-D01D-4CB5-8489-FE8F9655167B}"/>
-              </a:ext>
-            </a:extLst>
-          </p:cNvPr>
-          <p:cNvSpPr>
-            <a:spLocks xmlns:a="http://schemas.openxmlformats.org/drawingml/2006/main" noGrp="1"/>
-          </p:cNvSpPr>
-          <p:nvPr/>
-        </p:nvSpPr>
-        <p:spPr>
-          <a:xfrm xmlns:a="http://schemas.openxmlformats.org/drawingml/2006/main">
-            <a:off x="1000125" y="2247900"/>
-            <a:ext cx="476250" cy="476250"/>
-          </a:xfrm>
-          <a:prstGeom xmlns:a="http://schemas.openxmlformats.org/drawingml/2006/main" prst="ellipse">
+                <a16:creationId xmlns:a16="http://schemas.microsoft.com/office/drawing/2014/main" id="{7354A338-0786-46B8-B765-D7DA6F2AB3EB}"/>
+              </a:ext>
+            </a:extLst>
+          </p:cNvPr>
+          <p:cNvSpPr>
+            <a:spLocks xmlns:a="http://schemas.openxmlformats.org/drawingml/2006/main" noGrp="1"/>
+          </p:cNvSpPr>
+          <p:nvPr/>
+        </p:nvSpPr>
+        <p:spPr>
+          <a:xfrm xmlns:a="http://schemas.openxmlformats.org/drawingml/2006/main">
+            <a:off x="971550" y="2124075"/>
+            <a:ext cx="38100" cy="3524250"/>
+          </a:xfrm>
+          <a:prstGeom xmlns:a="http://schemas.openxmlformats.org/drawingml/2006/main" prst="rect">
             <a:avLst/>
           </a:prstGeom>
           <a:solidFill xmlns:a="http://schemas.openxmlformats.org/drawingml/2006/main">
-            <a:srgbClr val="18324A"/>
+            <a:srgbClr val="2C6E73"/>
           </a:solidFill>
           <a:ln xmlns:a="http://schemas.openxmlformats.org/drawingml/2006/main" w="0">
-            <a:noFill/>
+            <a:solidFill>
+              <a:srgbClr val="2C6E73"/>
+            </a:solidFill>
           </a:ln>
         </p:spPr>
       </p:sp>
@@ -8297,19 +8299,19 @@
           <p:cNvPr id="12" name="">
             <a:extLst xmlns:a="http://schemas.openxmlformats.org/drawingml/2006/main">
               <a:ext uri="{FF2B5EF4-FFF2-40B4-BE49-F238E27FC236}">
-                <a16:creationId xmlns:a16="http://schemas.microsoft.com/office/drawing/2014/main" id="{4A5D4C65-90A0-4511-B182-1639ADB6599A}"/>
-              </a:ext>
-            </a:extLst>
-          </p:cNvPr>
-          <p:cNvSpPr>
-            <a:spLocks xmlns:a="http://schemas.openxmlformats.org/drawingml/2006/main" noGrp="1"/>
-          </p:cNvSpPr>
-          <p:nvPr/>
-        </p:nvSpPr>
-        <p:spPr>
-          <a:xfrm xmlns:a="http://schemas.openxmlformats.org/drawingml/2006/main">
-            <a:off x="1000125" y="2276475"/>
-            <a:ext cx="476250" cy="419100"/>
+                <a16:creationId xmlns:a16="http://schemas.microsoft.com/office/drawing/2014/main" id="{DA0A68FE-767F-4A73-9025-BFD21A8F0455}"/>
+              </a:ext>
+            </a:extLst>
+          </p:cNvPr>
+          <p:cNvSpPr>
+            <a:spLocks xmlns:a="http://schemas.openxmlformats.org/drawingml/2006/main" noGrp="1"/>
+          </p:cNvSpPr>
+          <p:nvPr/>
+        </p:nvSpPr>
+        <p:spPr>
+          <a:xfrm xmlns:a="http://schemas.openxmlformats.org/drawingml/2006/main">
+            <a:off x="1162050" y="2200275"/>
+            <a:ext cx="400050" cy="400050"/>
           </a:xfrm>
           <a:prstGeom xmlns:a="http://schemas.openxmlformats.org/drawingml/2006/main" prst="rect">
             <a:avLst/>
@@ -8326,9 +8328,9 @@
           <a:lstStyle xmlns:a="http://schemas.openxmlformats.org/drawingml/2006/main"/>
           <a:p xmlns:a="http://schemas.openxmlformats.org/drawingml/2006/main">
             <a:pPr algn="ctr">
-              <a:defRPr sz="1350" b="1">
-                <a:solidFill>
-                  <a:srgbClr val="FFFFFF"/>
+              <a:defRPr sz="1125" b="1">
+                <a:solidFill>
+                  <a:srgbClr val="2C6E73"/>
                 </a:solidFill>
                 <a:latin typeface="Arial"/>
                 <a:ea typeface="Arial"/>
@@ -8336,9 +8338,9 @@
               </a:defRPr>
             </a:pPr>
             <a:r>
-              <a:rPr sz="1350" b="1">
-                <a:solidFill>
-                  <a:srgbClr val="FFFFFF"/>
+              <a:rPr sz="1125" b="1">
+                <a:solidFill>
+                  <a:srgbClr val="2C6E73"/>
                 </a:solidFill>
                 <a:latin typeface="Arial"/>
                 <a:ea typeface="Arial"/>
@@ -8354,19 +8356,19 @@
           <p:cNvPr id="13" name="">
             <a:extLst xmlns:a="http://schemas.openxmlformats.org/drawingml/2006/main">
               <a:ext uri="{FF2B5EF4-FFF2-40B4-BE49-F238E27FC236}">
-                <a16:creationId xmlns:a16="http://schemas.microsoft.com/office/drawing/2014/main" id="{9F0D0612-7F35-4D00-966E-A5883D530FEA}"/>
-              </a:ext>
-            </a:extLst>
-          </p:cNvPr>
-          <p:cNvSpPr>
-            <a:spLocks xmlns:a="http://schemas.openxmlformats.org/drawingml/2006/main" noGrp="1"/>
-          </p:cNvSpPr>
-          <p:nvPr/>
-        </p:nvSpPr>
-        <p:spPr>
-          <a:xfrm xmlns:a="http://schemas.openxmlformats.org/drawingml/2006/main">
-            <a:off x="1714500" y="2181225"/>
-            <a:ext cx="9429750" cy="609600"/>
+                <a16:creationId xmlns:a16="http://schemas.microsoft.com/office/drawing/2014/main" id="{4FA79389-3C99-4F6B-A77D-D0B65A5AF0C0}"/>
+              </a:ext>
+            </a:extLst>
+          </p:cNvPr>
+          <p:cNvSpPr>
+            <a:spLocks xmlns:a="http://schemas.openxmlformats.org/drawingml/2006/main" noGrp="1"/>
+          </p:cNvSpPr>
+          <p:nvPr/>
+        </p:nvSpPr>
+        <p:spPr>
+          <a:xfrm xmlns:a="http://schemas.openxmlformats.org/drawingml/2006/main">
+            <a:off x="1714500" y="2114550"/>
+            <a:ext cx="9525000" cy="809625"/>
           </a:xfrm>
           <a:prstGeom xmlns:a="http://schemas.openxmlformats.org/drawingml/2006/main" prst="rect">
             <a:avLst/>
@@ -8383,7 +8385,7 @@
           <a:lstStyle xmlns:a="http://schemas.openxmlformats.org/drawingml/2006/main"/>
           <a:p xmlns:a="http://schemas.openxmlformats.org/drawingml/2006/main">
             <a:pPr algn="l">
-              <a:defRPr sz="1500" b="0">
+              <a:defRPr sz="1725" b="0">
                 <a:solidFill>
                   <a:srgbClr val="17253A"/>
                 </a:solidFill>
@@ -8393,7 +8395,7 @@
               </a:defRPr>
             </a:pPr>
             <a:r>
-              <a:rPr sz="1500" b="0">
+              <a:rPr sz="1725" b="0">
                 <a:solidFill>
                   <a:srgbClr val="17253A"/>
                 </a:solidFill>
@@ -8401,7 +8403,7 @@
                 <a:ea typeface="Arial"/>
                 <a:cs typeface="Arial"/>
               </a:rPr>
-              <a:t>Identify the structure: Identify the domain and retrieve the relevant representation or method.</a:t>
+              <a:t>5/6 + 7/12</a:t>
             </a:r>
           </a:p>
         </p:txBody>
@@ -8411,28 +8413,30 @@
           <p:cNvPr id="14" name="">
             <a:extLst xmlns:a="http://schemas.openxmlformats.org/drawingml/2006/main">
               <a:ext uri="{FF2B5EF4-FFF2-40B4-BE49-F238E27FC236}">
-                <a16:creationId xmlns:a16="http://schemas.microsoft.com/office/drawing/2014/main" id="{9802CA16-75D1-4B64-B638-0588A37C9C50}"/>
-              </a:ext>
-            </a:extLst>
-          </p:cNvPr>
-          <p:cNvSpPr>
-            <a:spLocks xmlns:a="http://schemas.openxmlformats.org/drawingml/2006/main" noGrp="1"/>
-          </p:cNvSpPr>
-          <p:nvPr/>
-        </p:nvSpPr>
-        <p:spPr>
-          <a:xfrm xmlns:a="http://schemas.openxmlformats.org/drawingml/2006/main">
-            <a:off x="1000125" y="2990850"/>
-            <a:ext cx="476250" cy="476250"/>
-          </a:xfrm>
-          <a:prstGeom xmlns:a="http://schemas.openxmlformats.org/drawingml/2006/main" prst="ellipse">
+                <a16:creationId xmlns:a16="http://schemas.microsoft.com/office/drawing/2014/main" id="{5BFCA508-B3B9-48F0-892F-DF9DA0F25299}"/>
+              </a:ext>
+            </a:extLst>
+          </p:cNvPr>
+          <p:cNvSpPr>
+            <a:spLocks xmlns:a="http://schemas.openxmlformats.org/drawingml/2006/main" noGrp="1"/>
+          </p:cNvSpPr>
+          <p:nvPr/>
+        </p:nvSpPr>
+        <p:spPr>
+          <a:xfrm xmlns:a="http://schemas.openxmlformats.org/drawingml/2006/main">
+            <a:off x="1714500" y="2943225"/>
+            <a:ext cx="9334500" cy="9525"/>
+          </a:xfrm>
+          <a:prstGeom xmlns:a="http://schemas.openxmlformats.org/drawingml/2006/main" prst="rect">
             <a:avLst/>
           </a:prstGeom>
           <a:solidFill xmlns:a="http://schemas.openxmlformats.org/drawingml/2006/main">
-            <a:srgbClr val="2C6E73"/>
+            <a:srgbClr val="D9E0E6"/>
           </a:solidFill>
           <a:ln xmlns:a="http://schemas.openxmlformats.org/drawingml/2006/main" w="0">
-            <a:noFill/>
+            <a:solidFill>
+              <a:srgbClr val="D9E0E6"/>
+            </a:solidFill>
           </a:ln>
         </p:spPr>
       </p:sp>
@@ -8441,19 +8445,19 @@
           <p:cNvPr id="15" name="">
             <a:extLst xmlns:a="http://schemas.openxmlformats.org/drawingml/2006/main">
               <a:ext uri="{FF2B5EF4-FFF2-40B4-BE49-F238E27FC236}">
-                <a16:creationId xmlns:a16="http://schemas.microsoft.com/office/drawing/2014/main" id="{9BE82BB6-0F05-4567-8C62-FFECC9136D59}"/>
-              </a:ext>
-            </a:extLst>
-          </p:cNvPr>
-          <p:cNvSpPr>
-            <a:spLocks xmlns:a="http://schemas.openxmlformats.org/drawingml/2006/main" noGrp="1"/>
-          </p:cNvSpPr>
-          <p:nvPr/>
-        </p:nvSpPr>
-        <p:spPr>
-          <a:xfrm xmlns:a="http://schemas.openxmlformats.org/drawingml/2006/main">
-            <a:off x="1000125" y="3019425"/>
-            <a:ext cx="476250" cy="419100"/>
+                <a16:creationId xmlns:a16="http://schemas.microsoft.com/office/drawing/2014/main" id="{21829C01-5C04-41B9-93C4-06EBE2F9D6A9}"/>
+              </a:ext>
+            </a:extLst>
+          </p:cNvPr>
+          <p:cNvSpPr>
+            <a:spLocks xmlns:a="http://schemas.openxmlformats.org/drawingml/2006/main" noGrp="1"/>
+          </p:cNvSpPr>
+          <p:nvPr/>
+        </p:nvSpPr>
+        <p:spPr>
+          <a:xfrm xmlns:a="http://schemas.openxmlformats.org/drawingml/2006/main">
+            <a:off x="1162050" y="3076575"/>
+            <a:ext cx="400050" cy="400050"/>
           </a:xfrm>
           <a:prstGeom xmlns:a="http://schemas.openxmlformats.org/drawingml/2006/main" prst="rect">
             <a:avLst/>
@@ -8470,9 +8474,9 @@
           <a:lstStyle xmlns:a="http://schemas.openxmlformats.org/drawingml/2006/main"/>
           <a:p xmlns:a="http://schemas.openxmlformats.org/drawingml/2006/main">
             <a:pPr algn="ctr">
-              <a:defRPr sz="1350" b="1">
-                <a:solidFill>
-                  <a:srgbClr val="FFFFFF"/>
+              <a:defRPr sz="1125" b="1">
+                <a:solidFill>
+                  <a:srgbClr val="2C6E73"/>
                 </a:solidFill>
                 <a:latin typeface="Arial"/>
                 <a:ea typeface="Arial"/>
@@ -8480,9 +8484,9 @@
               </a:defRPr>
             </a:pPr>
             <a:r>
-              <a:rPr sz="1350" b="1">
-                <a:solidFill>
-                  <a:srgbClr val="FFFFFF"/>
+              <a:rPr sz="1125" b="1">
+                <a:solidFill>
+                  <a:srgbClr val="2C6E73"/>
                 </a:solidFill>
                 <a:latin typeface="Arial"/>
                 <a:ea typeface="Arial"/>
@@ -8498,19 +8502,19 @@
           <p:cNvPr id="16" name="">
             <a:extLst xmlns:a="http://schemas.openxmlformats.org/drawingml/2006/main">
               <a:ext uri="{FF2B5EF4-FFF2-40B4-BE49-F238E27FC236}">
-                <a16:creationId xmlns:a16="http://schemas.microsoft.com/office/drawing/2014/main" id="{30DF7998-C34F-46CF-9035-2A7A3179B290}"/>
-              </a:ext>
-            </a:extLst>
-          </p:cNvPr>
-          <p:cNvSpPr>
-            <a:spLocks xmlns:a="http://schemas.openxmlformats.org/drawingml/2006/main" noGrp="1"/>
-          </p:cNvSpPr>
-          <p:nvPr/>
-        </p:nvSpPr>
-        <p:spPr>
-          <a:xfrm xmlns:a="http://schemas.openxmlformats.org/drawingml/2006/main">
-            <a:off x="1714500" y="2924175"/>
-            <a:ext cx="9429750" cy="609600"/>
+                <a16:creationId xmlns:a16="http://schemas.microsoft.com/office/drawing/2014/main" id="{9201B694-A30E-4C4F-B1BC-4795660E201F}"/>
+              </a:ext>
+            </a:extLst>
+          </p:cNvPr>
+          <p:cNvSpPr>
+            <a:spLocks xmlns:a="http://schemas.openxmlformats.org/drawingml/2006/main" noGrp="1"/>
+          </p:cNvSpPr>
+          <p:nvPr/>
+        </p:nvSpPr>
+        <p:spPr>
+          <a:xfrm xmlns:a="http://schemas.openxmlformats.org/drawingml/2006/main">
+            <a:off x="1714500" y="2990850"/>
+            <a:ext cx="9525000" cy="809625"/>
           </a:xfrm>
           <a:prstGeom xmlns:a="http://schemas.openxmlformats.org/drawingml/2006/main" prst="rect">
             <a:avLst/>
@@ -8527,7 +8531,7 @@
           <a:lstStyle xmlns:a="http://schemas.openxmlformats.org/drawingml/2006/main"/>
           <a:p xmlns:a="http://schemas.openxmlformats.org/drawingml/2006/main">
             <a:pPr algn="l">
-              <a:defRPr sz="1500" b="0">
+              <a:defRPr sz="1725" b="0">
                 <a:solidFill>
                   <a:srgbClr val="17253A"/>
                 </a:solidFill>
@@ -8537,7 +8541,7 @@
               </a:defRPr>
             </a:pPr>
             <a:r>
-              <a:rPr sz="1500" b="0">
+              <a:rPr sz="1725" b="0">
                 <a:solidFill>
                   <a:srgbClr val="17253A"/>
                 </a:solidFill>
@@ -8545,7 +8549,7 @@
                 <a:ea typeface="Arial"/>
                 <a:cs typeface="Arial"/>
               </a:rPr>
-              <a:t>Set up the method: Show a complete calculation with precise vocabulary.</a:t>
+              <a:t>5/6 = 10/12</a:t>
             </a:r>
           </a:p>
         </p:txBody>
@@ -8555,28 +8559,30 @@
           <p:cNvPr id="17" name="">
             <a:extLst xmlns:a="http://schemas.openxmlformats.org/drawingml/2006/main">
               <a:ext uri="{FF2B5EF4-FFF2-40B4-BE49-F238E27FC236}">
-                <a16:creationId xmlns:a16="http://schemas.microsoft.com/office/drawing/2014/main" id="{6E250C63-E83D-46C7-9BDF-98EA5092FBF5}"/>
-              </a:ext>
-            </a:extLst>
-          </p:cNvPr>
-          <p:cNvSpPr>
-            <a:spLocks xmlns:a="http://schemas.openxmlformats.org/drawingml/2006/main" noGrp="1"/>
-          </p:cNvSpPr>
-          <p:nvPr/>
-        </p:nvSpPr>
-        <p:spPr>
-          <a:xfrm xmlns:a="http://schemas.openxmlformats.org/drawingml/2006/main">
-            <a:off x="1000125" y="3733800"/>
-            <a:ext cx="476250" cy="476250"/>
-          </a:xfrm>
-          <a:prstGeom xmlns:a="http://schemas.openxmlformats.org/drawingml/2006/main" prst="ellipse">
+                <a16:creationId xmlns:a16="http://schemas.microsoft.com/office/drawing/2014/main" id="{3307DE21-6161-4562-BACF-130CEEF173D6}"/>
+              </a:ext>
+            </a:extLst>
+          </p:cNvPr>
+          <p:cNvSpPr>
+            <a:spLocks xmlns:a="http://schemas.openxmlformats.org/drawingml/2006/main" noGrp="1"/>
+          </p:cNvSpPr>
+          <p:nvPr/>
+        </p:nvSpPr>
+        <p:spPr>
+          <a:xfrm xmlns:a="http://schemas.openxmlformats.org/drawingml/2006/main">
+            <a:off x="1714500" y="3819525"/>
+            <a:ext cx="9334500" cy="9525"/>
+          </a:xfrm>
+          <a:prstGeom xmlns:a="http://schemas.openxmlformats.org/drawingml/2006/main" prst="rect">
             <a:avLst/>
           </a:prstGeom>
           <a:solidFill xmlns:a="http://schemas.openxmlformats.org/drawingml/2006/main">
-            <a:srgbClr val="2C6E73"/>
+            <a:srgbClr val="D9E0E6"/>
           </a:solidFill>
           <a:ln xmlns:a="http://schemas.openxmlformats.org/drawingml/2006/main" w="0">
-            <a:noFill/>
+            <a:solidFill>
+              <a:srgbClr val="D9E0E6"/>
+            </a:solidFill>
           </a:ln>
         </p:spPr>
       </p:sp>
@@ -8585,19 +8591,19 @@
           <p:cNvPr id="18" name="">
             <a:extLst xmlns:a="http://schemas.openxmlformats.org/drawingml/2006/main">
               <a:ext uri="{FF2B5EF4-FFF2-40B4-BE49-F238E27FC236}">
-                <a16:creationId xmlns:a16="http://schemas.microsoft.com/office/drawing/2014/main" id="{F4A74159-1766-48B5-930B-7BA3E544769E}"/>
-              </a:ext>
-            </a:extLst>
-          </p:cNvPr>
-          <p:cNvSpPr>
-            <a:spLocks xmlns:a="http://schemas.openxmlformats.org/drawingml/2006/main" noGrp="1"/>
-          </p:cNvSpPr>
-          <p:nvPr/>
-        </p:nvSpPr>
-        <p:spPr>
-          <a:xfrm xmlns:a="http://schemas.openxmlformats.org/drawingml/2006/main">
-            <a:off x="1000125" y="3762375"/>
-            <a:ext cx="476250" cy="419100"/>
+                <a16:creationId xmlns:a16="http://schemas.microsoft.com/office/drawing/2014/main" id="{0F2EC8AF-F6F7-4B81-A194-AFD82CB67C21}"/>
+              </a:ext>
+            </a:extLst>
+          </p:cNvPr>
+          <p:cNvSpPr>
+            <a:spLocks xmlns:a="http://schemas.openxmlformats.org/drawingml/2006/main" noGrp="1"/>
+          </p:cNvSpPr>
+          <p:nvPr/>
+        </p:nvSpPr>
+        <p:spPr>
+          <a:xfrm xmlns:a="http://schemas.openxmlformats.org/drawingml/2006/main">
+            <a:off x="1162050" y="3952875"/>
+            <a:ext cx="400050" cy="400050"/>
           </a:xfrm>
           <a:prstGeom xmlns:a="http://schemas.openxmlformats.org/drawingml/2006/main" prst="rect">
             <a:avLst/>
@@ -8614,9 +8620,9 @@
           <a:lstStyle xmlns:a="http://schemas.openxmlformats.org/drawingml/2006/main"/>
           <a:p xmlns:a="http://schemas.openxmlformats.org/drawingml/2006/main">
             <a:pPr algn="ctr">
-              <a:defRPr sz="1350" b="1">
-                <a:solidFill>
-                  <a:srgbClr val="FFFFFF"/>
+              <a:defRPr sz="1125" b="1">
+                <a:solidFill>
+                  <a:srgbClr val="2C6E73"/>
                 </a:solidFill>
                 <a:latin typeface="Arial"/>
                 <a:ea typeface="Arial"/>
@@ -8624,9 +8630,9 @@
               </a:defRPr>
             </a:pPr>
             <a:r>
-              <a:rPr sz="1350" b="1">
-                <a:solidFill>
-                  <a:srgbClr val="FFFFFF"/>
+              <a:rPr sz="1125" b="1">
+                <a:solidFill>
+                  <a:srgbClr val="2C6E73"/>
                 </a:solidFill>
                 <a:latin typeface="Arial"/>
                 <a:ea typeface="Arial"/>
@@ -8642,19 +8648,19 @@
           <p:cNvPr id="19" name="">
             <a:extLst xmlns:a="http://schemas.openxmlformats.org/drawingml/2006/main">
               <a:ext uri="{FF2B5EF4-FFF2-40B4-BE49-F238E27FC236}">
-                <a16:creationId xmlns:a16="http://schemas.microsoft.com/office/drawing/2014/main" id="{E17D5C9E-0B52-44E9-9A79-DB707E8EED1C}"/>
-              </a:ext>
-            </a:extLst>
-          </p:cNvPr>
-          <p:cNvSpPr>
-            <a:spLocks xmlns:a="http://schemas.openxmlformats.org/drawingml/2006/main" noGrp="1"/>
-          </p:cNvSpPr>
-          <p:nvPr/>
-        </p:nvSpPr>
-        <p:spPr>
-          <a:xfrm xmlns:a="http://schemas.openxmlformats.org/drawingml/2006/main">
-            <a:off x="1714500" y="3667125"/>
-            <a:ext cx="9429750" cy="609600"/>
+                <a16:creationId xmlns:a16="http://schemas.microsoft.com/office/drawing/2014/main" id="{340D488E-2A99-496D-8CC9-FFACFE199048}"/>
+              </a:ext>
+            </a:extLst>
+          </p:cNvPr>
+          <p:cNvSpPr>
+            <a:spLocks xmlns:a="http://schemas.openxmlformats.org/drawingml/2006/main" noGrp="1"/>
+          </p:cNvSpPr>
+          <p:nvPr/>
+        </p:nvSpPr>
+        <p:spPr>
+          <a:xfrm xmlns:a="http://schemas.openxmlformats.org/drawingml/2006/main">
+            <a:off x="1714500" y="3867150"/>
+            <a:ext cx="9525000" cy="809625"/>
           </a:xfrm>
           <a:prstGeom xmlns:a="http://schemas.openxmlformats.org/drawingml/2006/main" prst="rect">
             <a:avLst/>
@@ -8671,7 +8677,7 @@
           <a:lstStyle xmlns:a="http://schemas.openxmlformats.org/drawingml/2006/main"/>
           <a:p xmlns:a="http://schemas.openxmlformats.org/drawingml/2006/main">
             <a:pPr algn="l">
-              <a:defRPr sz="1500" b="0">
+              <a:defRPr sz="1725" b="0">
                 <a:solidFill>
                   <a:srgbClr val="17253A"/>
                 </a:solidFill>
@@ -8681,7 +8687,7 @@
               </a:defRPr>
             </a:pPr>
             <a:r>
-              <a:rPr sz="1500" b="0">
+              <a:rPr sz="1725" b="0">
                 <a:solidFill>
                   <a:srgbClr val="17253A"/>
                 </a:solidFill>
@@ -8689,7 +8695,7 @@
                 <a:ea typeface="Arial"/>
                 <a:cs typeface="Arial"/>
               </a:rPr>
-              <a:t>Complete the calculation: 1 5/12.</a:t>
+              <a:t>10/12 + 7/12 = 17/12</a:t>
             </a:r>
           </a:p>
         </p:txBody>
@@ -8699,28 +8705,30 @@
           <p:cNvPr id="20" name="">
             <a:extLst xmlns:a="http://schemas.openxmlformats.org/drawingml/2006/main">
               <a:ext uri="{FF2B5EF4-FFF2-40B4-BE49-F238E27FC236}">
-                <a16:creationId xmlns:a16="http://schemas.microsoft.com/office/drawing/2014/main" id="{E6F24D51-E46B-4687-9A9B-9B38AE9370E7}"/>
-              </a:ext>
-            </a:extLst>
-          </p:cNvPr>
-          <p:cNvSpPr>
-            <a:spLocks xmlns:a="http://schemas.openxmlformats.org/drawingml/2006/main" noGrp="1"/>
-          </p:cNvSpPr>
-          <p:nvPr/>
-        </p:nvSpPr>
-        <p:spPr>
-          <a:xfrm xmlns:a="http://schemas.openxmlformats.org/drawingml/2006/main">
-            <a:off x="1000125" y="4476750"/>
-            <a:ext cx="476250" cy="476250"/>
-          </a:xfrm>
-          <a:prstGeom xmlns:a="http://schemas.openxmlformats.org/drawingml/2006/main" prst="ellipse">
+                <a16:creationId xmlns:a16="http://schemas.microsoft.com/office/drawing/2014/main" id="{16A252A2-841B-4ACC-912A-6BCAB3A1424F}"/>
+              </a:ext>
+            </a:extLst>
+          </p:cNvPr>
+          <p:cNvSpPr>
+            <a:spLocks xmlns:a="http://schemas.openxmlformats.org/drawingml/2006/main" noGrp="1"/>
+          </p:cNvSpPr>
+          <p:nvPr/>
+        </p:nvSpPr>
+        <p:spPr>
+          <a:xfrm xmlns:a="http://schemas.openxmlformats.org/drawingml/2006/main">
+            <a:off x="1714500" y="4695825"/>
+            <a:ext cx="9334500" cy="9525"/>
+          </a:xfrm>
+          <a:prstGeom xmlns:a="http://schemas.openxmlformats.org/drawingml/2006/main" prst="rect">
             <a:avLst/>
           </a:prstGeom>
           <a:solidFill xmlns:a="http://schemas.openxmlformats.org/drawingml/2006/main">
-            <a:srgbClr val="2C6E73"/>
+            <a:srgbClr val="D9E0E6"/>
           </a:solidFill>
           <a:ln xmlns:a="http://schemas.openxmlformats.org/drawingml/2006/main" w="0">
-            <a:noFill/>
+            <a:solidFill>
+              <a:srgbClr val="D9E0E6"/>
+            </a:solidFill>
           </a:ln>
         </p:spPr>
       </p:sp>
@@ -8729,19 +8737,19 @@
           <p:cNvPr id="21" name="">
             <a:extLst xmlns:a="http://schemas.openxmlformats.org/drawingml/2006/main">
               <a:ext uri="{FF2B5EF4-FFF2-40B4-BE49-F238E27FC236}">
-                <a16:creationId xmlns:a16="http://schemas.microsoft.com/office/drawing/2014/main" id="{14199125-5836-4417-8652-4AE7384D2E0D}"/>
-              </a:ext>
-            </a:extLst>
-          </p:cNvPr>
-          <p:cNvSpPr>
-            <a:spLocks xmlns:a="http://schemas.openxmlformats.org/drawingml/2006/main" noGrp="1"/>
-          </p:cNvSpPr>
-          <p:nvPr/>
-        </p:nvSpPr>
-        <p:spPr>
-          <a:xfrm xmlns:a="http://schemas.openxmlformats.org/drawingml/2006/main">
-            <a:off x="1000125" y="4505325"/>
-            <a:ext cx="476250" cy="419100"/>
+                <a16:creationId xmlns:a16="http://schemas.microsoft.com/office/drawing/2014/main" id="{50D95C3E-CA85-40CD-A90C-B242CDE21670}"/>
+              </a:ext>
+            </a:extLst>
+          </p:cNvPr>
+          <p:cNvSpPr>
+            <a:spLocks xmlns:a="http://schemas.openxmlformats.org/drawingml/2006/main" noGrp="1"/>
+          </p:cNvSpPr>
+          <p:nvPr/>
+        </p:nvSpPr>
+        <p:spPr>
+          <a:xfrm xmlns:a="http://schemas.openxmlformats.org/drawingml/2006/main">
+            <a:off x="1162050" y="4829175"/>
+            <a:ext cx="400050" cy="400050"/>
           </a:xfrm>
           <a:prstGeom xmlns:a="http://schemas.openxmlformats.org/drawingml/2006/main" prst="rect">
             <a:avLst/>
@@ -8758,9 +8766,9 @@
           <a:lstStyle xmlns:a="http://schemas.openxmlformats.org/drawingml/2006/main"/>
           <a:p xmlns:a="http://schemas.openxmlformats.org/drawingml/2006/main">
             <a:pPr algn="ctr">
-              <a:defRPr sz="1350" b="1">
-                <a:solidFill>
-                  <a:srgbClr val="FFFFFF"/>
+              <a:defRPr sz="1125" b="1">
+                <a:solidFill>
+                  <a:srgbClr val="2F785D"/>
                 </a:solidFill>
                 <a:latin typeface="Arial"/>
                 <a:ea typeface="Arial"/>
@@ -8768,9 +8776,9 @@
               </a:defRPr>
             </a:pPr>
             <a:r>
-              <a:rPr sz="1350" b="1">
-                <a:solidFill>
-                  <a:srgbClr val="FFFFFF"/>
+              <a:rPr sz="1125" b="1">
+                <a:solidFill>
+                  <a:srgbClr val="2F785D"/>
                 </a:solidFill>
                 <a:latin typeface="Arial"/>
                 <a:ea typeface="Arial"/>
@@ -8786,19 +8794,19 @@
           <p:cNvPr id="22" name="">
             <a:extLst xmlns:a="http://schemas.openxmlformats.org/drawingml/2006/main">
               <a:ext uri="{FF2B5EF4-FFF2-40B4-BE49-F238E27FC236}">
-                <a16:creationId xmlns:a16="http://schemas.microsoft.com/office/drawing/2014/main" id="{22ABD81D-EFB9-486C-B93F-EC76B0A987F7}"/>
-              </a:ext>
-            </a:extLst>
-          </p:cNvPr>
-          <p:cNvSpPr>
-            <a:spLocks xmlns:a="http://schemas.openxmlformats.org/drawingml/2006/main" noGrp="1"/>
-          </p:cNvSpPr>
-          <p:nvPr/>
-        </p:nvSpPr>
-        <p:spPr>
-          <a:xfrm xmlns:a="http://schemas.openxmlformats.org/drawingml/2006/main">
-            <a:off x="1714500" y="4410075"/>
-            <a:ext cx="9429750" cy="609600"/>
+                <a16:creationId xmlns:a16="http://schemas.microsoft.com/office/drawing/2014/main" id="{7774E2F9-6D7D-455F-B698-B368294F3A8A}"/>
+              </a:ext>
+            </a:extLst>
+          </p:cNvPr>
+          <p:cNvSpPr>
+            <a:spLocks xmlns:a="http://schemas.openxmlformats.org/drawingml/2006/main" noGrp="1"/>
+          </p:cNvSpPr>
+          <p:nvPr/>
+        </p:nvSpPr>
+        <p:spPr>
+          <a:xfrm xmlns:a="http://schemas.openxmlformats.org/drawingml/2006/main">
+            <a:off x="1714500" y="4743450"/>
+            <a:ext cx="9525000" cy="809625"/>
           </a:xfrm>
           <a:prstGeom xmlns:a="http://schemas.openxmlformats.org/drawingml/2006/main" prst="rect">
             <a:avLst/>
@@ -8815,7 +8823,7 @@
           <a:lstStyle xmlns:a="http://schemas.openxmlformats.org/drawingml/2006/main"/>
           <a:p xmlns:a="http://schemas.openxmlformats.org/drawingml/2006/main">
             <a:pPr algn="l">
-              <a:defRPr sz="1500" b="1">
+              <a:defRPr sz="1725" b="1">
                 <a:solidFill>
                   <a:srgbClr val="2F785D"/>
                 </a:solidFill>
@@ -8825,7 +8833,7 @@
               </a:defRPr>
             </a:pPr>
             <a:r>
-              <a:rPr sz="1500" b="1">
+              <a:rPr sz="1725" b="1">
                 <a:solidFill>
                   <a:srgbClr val="2F785D"/>
                 </a:solidFill>
@@ -8833,7 +8841,7 @@
                 <a:ea typeface="Arial"/>
                 <a:cs typeface="Arial"/>
               </a:rPr>
-              <a:t>Check the result: Check the result and record a specific next step.</a:t>
+              <a:t>17/12 = 1 5/12</a:t>
             </a:r>
           </a:p>
         </p:txBody>
@@ -8841,7 +8849,7 @@
     </p:spTree>
     <p:extLst>
       <p:ext uri="{BB962C8B-B14F-4D97-AF65-F5344CB8AC3E}">
-        <p14:creationId xmlns:p14="http://schemas.microsoft.com/office/powerpoint/2010/main" val="1500528018"/>
+        <p14:creationId xmlns:p14="http://schemas.microsoft.com/office/powerpoint/2010/main" val="1984418826"/>
       </p:ext>
     </p:extLst>
   </p:cSld>
@@ -9134,7 +9142,7 @@
           <p:cNvPr id="15" name="">
             <a:extLst xmlns:a="http://schemas.openxmlformats.org/drawingml/2006/main">
               <a:ext uri="{FF2B5EF4-FFF2-40B4-BE49-F238E27FC236}">
-                <a16:creationId xmlns:a16="http://schemas.microsoft.com/office/drawing/2014/main" id="{E4A12FFD-B9F4-4499-AB37-40F4DE30BF4D}"/>
+                <a16:creationId xmlns:a16="http://schemas.microsoft.com/office/drawing/2014/main" id="{7FA61906-A912-4083-94B5-E614E70BD4F1}"/>
               </a:ext>
             </a:extLst>
           </p:cNvPr>
@@ -9166,7 +9174,7 @@
           <p:cNvPr id="2" name="">
             <a:extLst xmlns:a="http://schemas.openxmlformats.org/drawingml/2006/main">
               <a:ext uri="{FF2B5EF4-FFF2-40B4-BE49-F238E27FC236}">
-                <a16:creationId xmlns:a16="http://schemas.microsoft.com/office/drawing/2014/main" id="{C77A891B-175F-43C1-9E6F-736905650833}"/>
+                <a16:creationId xmlns:a16="http://schemas.microsoft.com/office/drawing/2014/main" id="{8B01B453-B9D7-4115-AE16-3C31F01EC7A5}"/>
               </a:ext>
             </a:extLst>
           </p:cNvPr>
@@ -9223,7 +9231,7 @@
           <p:cNvPr id="3" name="">
             <a:extLst xmlns:a="http://schemas.openxmlformats.org/drawingml/2006/main">
               <a:ext uri="{FF2B5EF4-FFF2-40B4-BE49-F238E27FC236}">
-                <a16:creationId xmlns:a16="http://schemas.microsoft.com/office/drawing/2014/main" id="{E8DED71F-FFF9-4C39-9C0D-AE0BC3FDB9FF}"/>
+                <a16:creationId xmlns:a16="http://schemas.microsoft.com/office/drawing/2014/main" id="{57557662-C4BD-4F0B-9312-3A31E611E9F3}"/>
               </a:ext>
             </a:extLst>
           </p:cNvPr>
@@ -9255,7 +9263,7 @@
           <p:cNvPr id="4" name="">
             <a:extLst xmlns:a="http://schemas.openxmlformats.org/drawingml/2006/main">
               <a:ext uri="{FF2B5EF4-FFF2-40B4-BE49-F238E27FC236}">
-                <a16:creationId xmlns:a16="http://schemas.microsoft.com/office/drawing/2014/main" id="{0F26EC76-3475-487A-90DE-38BBD609A531}"/>
+                <a16:creationId xmlns:a16="http://schemas.microsoft.com/office/drawing/2014/main" id="{4B58F4F7-D299-4547-82AE-A7CBE4AC5C45}"/>
               </a:ext>
             </a:extLst>
           </p:cNvPr>
@@ -9312,7 +9320,7 @@
           <p:cNvPr id="5" name="">
             <a:extLst xmlns:a="http://schemas.openxmlformats.org/drawingml/2006/main">
               <a:ext uri="{FF2B5EF4-FFF2-40B4-BE49-F238E27FC236}">
-                <a16:creationId xmlns:a16="http://schemas.microsoft.com/office/drawing/2014/main" id="{2E91EBB5-14DC-40AD-A64F-30AAA421A8DD}"/>
+                <a16:creationId xmlns:a16="http://schemas.microsoft.com/office/drawing/2014/main" id="{4EE67A8B-770C-41EA-9C55-C9444832D749}"/>
               </a:ext>
             </a:extLst>
           </p:cNvPr>
@@ -9369,7 +9377,7 @@
           <p:cNvPr id="6" name="">
             <a:extLst xmlns:a="http://schemas.openxmlformats.org/drawingml/2006/main">
               <a:ext uri="{FF2B5EF4-FFF2-40B4-BE49-F238E27FC236}">
-                <a16:creationId xmlns:a16="http://schemas.microsoft.com/office/drawing/2014/main" id="{D15028EE-424A-4FFD-A6E4-E53B37420D77}"/>
+                <a16:creationId xmlns:a16="http://schemas.microsoft.com/office/drawing/2014/main" id="{B86EA4C5-CF25-48F5-924A-ADD50F9036AA}"/>
               </a:ext>
             </a:extLst>
           </p:cNvPr>
@@ -9426,7 +9434,7 @@
           <p:cNvPr id="7" name="">
             <a:extLst xmlns:a="http://schemas.openxmlformats.org/drawingml/2006/main">
               <a:ext uri="{FF2B5EF4-FFF2-40B4-BE49-F238E27FC236}">
-                <a16:creationId xmlns:a16="http://schemas.microsoft.com/office/drawing/2014/main" id="{84B67634-AAD9-485F-9604-4DA392BA3A61}"/>
+                <a16:creationId xmlns:a16="http://schemas.microsoft.com/office/drawing/2014/main" id="{2F3DC44A-868B-4863-98A2-22063D5BD21C}"/>
               </a:ext>
             </a:extLst>
           </p:cNvPr>
@@ -9458,7 +9466,7 @@
           <p:cNvPr id="8" name="">
             <a:extLst xmlns:a="http://schemas.openxmlformats.org/drawingml/2006/main">
               <a:ext uri="{FF2B5EF4-FFF2-40B4-BE49-F238E27FC236}">
-                <a16:creationId xmlns:a16="http://schemas.microsoft.com/office/drawing/2014/main" id="{7C151A3A-4B71-446A-B239-A22B29D7979F}"/>
+                <a16:creationId xmlns:a16="http://schemas.microsoft.com/office/drawing/2014/main" id="{2DECF91C-00A9-4D70-B0A7-218521218BDD}"/>
               </a:ext>
             </a:extLst>
           </p:cNvPr>
@@ -9515,7 +9523,7 @@
           <p:cNvPr id="9" name="">
             <a:extLst xmlns:a="http://schemas.openxmlformats.org/drawingml/2006/main">
               <a:ext uri="{FF2B5EF4-FFF2-40B4-BE49-F238E27FC236}">
-                <a16:creationId xmlns:a16="http://schemas.microsoft.com/office/drawing/2014/main" id="{4943344C-9340-4578-9329-0BE356954131}"/>
+                <a16:creationId xmlns:a16="http://schemas.microsoft.com/office/drawing/2014/main" id="{FB2DBDBD-D128-422D-80F7-A04C6B9041B8}"/>
               </a:ext>
             </a:extLst>
           </p:cNvPr>
@@ -9572,7 +9580,7 @@
           <p:cNvPr id="10" name="">
             <a:extLst xmlns:a="http://schemas.openxmlformats.org/drawingml/2006/main">
               <a:ext uri="{FF2B5EF4-FFF2-40B4-BE49-F238E27FC236}">
-                <a16:creationId xmlns:a16="http://schemas.microsoft.com/office/drawing/2014/main" id="{84C73855-0DBC-4B77-A5E7-11C448D38D21}"/>
+                <a16:creationId xmlns:a16="http://schemas.microsoft.com/office/drawing/2014/main" id="{525409F6-179A-480D-9EB5-7422CADDEF58}"/>
               </a:ext>
             </a:extLst>
           </p:cNvPr>
@@ -9629,7 +9637,7 @@
           <p:cNvPr id="11" name="">
             <a:extLst xmlns:a="http://schemas.openxmlformats.org/drawingml/2006/main">
               <a:ext uri="{FF2B5EF4-FFF2-40B4-BE49-F238E27FC236}">
-                <a16:creationId xmlns:a16="http://schemas.microsoft.com/office/drawing/2014/main" id="{51736243-B64A-48C0-83B4-A328BF17DC07}"/>
+                <a16:creationId xmlns:a16="http://schemas.microsoft.com/office/drawing/2014/main" id="{7C448F0E-565D-4DEB-83F6-44055608992A}"/>
               </a:ext>
             </a:extLst>
           </p:cNvPr>
@@ -9686,7 +9694,7 @@
           <p:cNvPr id="12" name="">
             <a:extLst xmlns:a="http://schemas.openxmlformats.org/drawingml/2006/main">
               <a:ext uri="{FF2B5EF4-FFF2-40B4-BE49-F238E27FC236}">
-                <a16:creationId xmlns:a16="http://schemas.microsoft.com/office/drawing/2014/main" id="{072F235C-C96F-4A18-98BF-19EC0CA0D2C8}"/>
+                <a16:creationId xmlns:a16="http://schemas.microsoft.com/office/drawing/2014/main" id="{47CF5B13-8F3B-4640-8249-F95F7636C085}"/>
               </a:ext>
             </a:extLst>
           </p:cNvPr>
@@ -9718,7 +9726,7 @@
           <p:cNvPr id="13" name="">
             <a:extLst xmlns:a="http://schemas.openxmlformats.org/drawingml/2006/main">
               <a:ext uri="{FF2B5EF4-FFF2-40B4-BE49-F238E27FC236}">
-                <a16:creationId xmlns:a16="http://schemas.microsoft.com/office/drawing/2014/main" id="{BB819CE7-5F4D-462D-85F3-B5D13FD20BDD}"/>
+                <a16:creationId xmlns:a16="http://schemas.microsoft.com/office/drawing/2014/main" id="{EFB7F9A0-BB0C-4ACA-80FB-CEA89D4B7BDC}"/>
               </a:ext>
             </a:extLst>
           </p:cNvPr>
@@ -9775,7 +9783,7 @@
           <p:cNvPr id="14" name="">
             <a:extLst xmlns:a="http://schemas.openxmlformats.org/drawingml/2006/main">
               <a:ext uri="{FF2B5EF4-FFF2-40B4-BE49-F238E27FC236}">
-                <a16:creationId xmlns:a16="http://schemas.microsoft.com/office/drawing/2014/main" id="{CC78498F-D995-44D5-9C7D-F4B0E8867D2D}"/>
+                <a16:creationId xmlns:a16="http://schemas.microsoft.com/office/drawing/2014/main" id="{06AB2E1C-DC2C-456D-887D-839512A86C67}"/>
               </a:ext>
             </a:extLst>
           </p:cNvPr>
@@ -9830,7 +9838,7 @@
     </p:spTree>
     <p:extLst>
       <p:ext uri="{BB962C8B-B14F-4D97-AF65-F5344CB8AC3E}">
-        <p14:creationId xmlns:p14="http://schemas.microsoft.com/office/powerpoint/2010/main" val="2093221626"/>
+        <p14:creationId xmlns:p14="http://schemas.microsoft.com/office/powerpoint/2010/main" val="445502834"/>
       </p:ext>
     </p:extLst>
   </p:cSld>
@@ -10031,7 +10039,7 @@
           <p:cNvPr id="16" name="">
             <a:extLst xmlns:a="http://schemas.openxmlformats.org/drawingml/2006/main">
               <a:ext uri="{FF2B5EF4-FFF2-40B4-BE49-F238E27FC236}">
-                <a16:creationId xmlns:a16="http://schemas.microsoft.com/office/drawing/2014/main" id="{55C5F403-4D95-40D4-AF34-B12D162DC197}"/>
+                <a16:creationId xmlns:a16="http://schemas.microsoft.com/office/drawing/2014/main" id="{A18E1349-CB5B-4802-ABBC-6D7EDCFA69D5}"/>
               </a:ext>
             </a:extLst>
           </p:cNvPr>
@@ -10063,7 +10071,7 @@
           <p:cNvPr id="2" name="">
             <a:extLst xmlns:a="http://schemas.openxmlformats.org/drawingml/2006/main">
               <a:ext uri="{FF2B5EF4-FFF2-40B4-BE49-F238E27FC236}">
-                <a16:creationId xmlns:a16="http://schemas.microsoft.com/office/drawing/2014/main" id="{8701931B-3A33-4948-8BE3-134D2B63B57B}"/>
+                <a16:creationId xmlns:a16="http://schemas.microsoft.com/office/drawing/2014/main" id="{5B18C5D5-B5DF-4E13-BCE7-5E15AB61EDE8}"/>
               </a:ext>
             </a:extLst>
           </p:cNvPr>
@@ -10120,7 +10128,7 @@
           <p:cNvPr id="3" name="">
             <a:extLst xmlns:a="http://schemas.openxmlformats.org/drawingml/2006/main">
               <a:ext uri="{FF2B5EF4-FFF2-40B4-BE49-F238E27FC236}">
-                <a16:creationId xmlns:a16="http://schemas.microsoft.com/office/drawing/2014/main" id="{D651EE7D-F70C-4DA0-B2D2-F912841507FC}"/>
+                <a16:creationId xmlns:a16="http://schemas.microsoft.com/office/drawing/2014/main" id="{5E121376-A9F2-4B0B-A5C0-C6A1494ADC45}"/>
               </a:ext>
             </a:extLst>
           </p:cNvPr>
@@ -10152,7 +10160,7 @@
           <p:cNvPr id="4" name="">
             <a:extLst xmlns:a="http://schemas.openxmlformats.org/drawingml/2006/main">
               <a:ext uri="{FF2B5EF4-FFF2-40B4-BE49-F238E27FC236}">
-                <a16:creationId xmlns:a16="http://schemas.microsoft.com/office/drawing/2014/main" id="{673CF00E-EEC4-4E34-B774-A32E8CB17B97}"/>
+                <a16:creationId xmlns:a16="http://schemas.microsoft.com/office/drawing/2014/main" id="{F6868DDF-2C01-43E3-A876-51A8D9C36672}"/>
               </a:ext>
             </a:extLst>
           </p:cNvPr>
@@ -10209,7 +10217,7 @@
           <p:cNvPr id="5" name="">
             <a:extLst xmlns:a="http://schemas.openxmlformats.org/drawingml/2006/main">
               <a:ext uri="{FF2B5EF4-FFF2-40B4-BE49-F238E27FC236}">
-                <a16:creationId xmlns:a16="http://schemas.microsoft.com/office/drawing/2014/main" id="{8FFDD1AE-3FC1-439D-A513-2A601C77ACA4}"/>
+                <a16:creationId xmlns:a16="http://schemas.microsoft.com/office/drawing/2014/main" id="{7B11ECBD-1837-4A2D-873E-622493DD71A1}"/>
               </a:ext>
             </a:extLst>
           </p:cNvPr>
@@ -10266,7 +10274,7 @@
           <p:cNvPr id="6" name="">
             <a:extLst xmlns:a="http://schemas.openxmlformats.org/drawingml/2006/main">
               <a:ext uri="{FF2B5EF4-FFF2-40B4-BE49-F238E27FC236}">
-                <a16:creationId xmlns:a16="http://schemas.microsoft.com/office/drawing/2014/main" id="{C18151F5-7E38-491D-81EB-3C49E6320B74}"/>
+                <a16:creationId xmlns:a16="http://schemas.microsoft.com/office/drawing/2014/main" id="{30FD029C-8670-48E7-9535-774A5941A308}"/>
               </a:ext>
             </a:extLst>
           </p:cNvPr>
@@ -10323,7 +10331,7 @@
           <p:cNvPr id="7" name="">
             <a:extLst xmlns:a="http://schemas.openxmlformats.org/drawingml/2006/main">
               <a:ext uri="{FF2B5EF4-FFF2-40B4-BE49-F238E27FC236}">
-                <a16:creationId xmlns:a16="http://schemas.microsoft.com/office/drawing/2014/main" id="{A0015B4B-89A4-4A3F-8ED4-3E8D2E12359A}"/>
+                <a16:creationId xmlns:a16="http://schemas.microsoft.com/office/drawing/2014/main" id="{B3F14A87-A57B-461E-95A1-A3DD885954B5}"/>
               </a:ext>
             </a:extLst>
           </p:cNvPr>
@@ -10355,7 +10363,7 @@
           <p:cNvPr id="8" name="">
             <a:extLst xmlns:a="http://schemas.openxmlformats.org/drawingml/2006/main">
               <a:ext uri="{FF2B5EF4-FFF2-40B4-BE49-F238E27FC236}">
-                <a16:creationId xmlns:a16="http://schemas.microsoft.com/office/drawing/2014/main" id="{E4C16BE6-790A-425C-BBC3-F036F5F6B365}"/>
+                <a16:creationId xmlns:a16="http://schemas.microsoft.com/office/drawing/2014/main" id="{2B66B9E1-F8C9-4650-AF1F-751327884F9D}"/>
               </a:ext>
             </a:extLst>
           </p:cNvPr>
@@ -10412,7 +10420,7 @@
           <p:cNvPr id="9" name="">
             <a:extLst xmlns:a="http://schemas.openxmlformats.org/drawingml/2006/main">
               <a:ext uri="{FF2B5EF4-FFF2-40B4-BE49-F238E27FC236}">
-                <a16:creationId xmlns:a16="http://schemas.microsoft.com/office/drawing/2014/main" id="{63886B25-076D-4C6A-8FE6-6CB40558B1C4}"/>
+                <a16:creationId xmlns:a16="http://schemas.microsoft.com/office/drawing/2014/main" id="{C3DD03F6-DC13-4821-9ECD-7ED3D27CDC91}"/>
               </a:ext>
             </a:extLst>
           </p:cNvPr>
@@ -10469,7 +10477,7 @@
           <p:cNvPr id="10" name="">
             <a:extLst xmlns:a="http://schemas.openxmlformats.org/drawingml/2006/main">
               <a:ext uri="{FF2B5EF4-FFF2-40B4-BE49-F238E27FC236}">
-                <a16:creationId xmlns:a16="http://schemas.microsoft.com/office/drawing/2014/main" id="{3428AFF5-6A8C-48F8-846D-891DDA9C5DF3}"/>
+                <a16:creationId xmlns:a16="http://schemas.microsoft.com/office/drawing/2014/main" id="{555F8837-63D0-4ECD-9EC5-1AEDC48B6A28}"/>
               </a:ext>
             </a:extLst>
           </p:cNvPr>
@@ -10526,7 +10534,7 @@
           <p:cNvPr id="11" name="">
             <a:extLst xmlns:a="http://schemas.openxmlformats.org/drawingml/2006/main">
               <a:ext uri="{FF2B5EF4-FFF2-40B4-BE49-F238E27FC236}">
-                <a16:creationId xmlns:a16="http://schemas.microsoft.com/office/drawing/2014/main" id="{9D58D1A7-2FBB-449D-9CC1-42E8DC1FBE3D}"/>
+                <a16:creationId xmlns:a16="http://schemas.microsoft.com/office/drawing/2014/main" id="{720DCCDA-A601-42B9-8189-F60E20062828}"/>
               </a:ext>
             </a:extLst>
           </p:cNvPr>
@@ -10583,7 +10591,7 @@
           <p:cNvPr id="12" name="">
             <a:extLst xmlns:a="http://schemas.openxmlformats.org/drawingml/2006/main">
               <a:ext uri="{FF2B5EF4-FFF2-40B4-BE49-F238E27FC236}">
-                <a16:creationId xmlns:a16="http://schemas.microsoft.com/office/drawing/2014/main" id="{884DE741-5C7C-4BA3-9BDA-859D5BE0646D}"/>
+                <a16:creationId xmlns:a16="http://schemas.microsoft.com/office/drawing/2014/main" id="{F95CB52A-1B46-4392-8769-921C9448DB02}"/>
               </a:ext>
             </a:extLst>
           </p:cNvPr>
@@ -10640,7 +10648,7 @@
           <p:cNvPr id="13" name="">
             <a:extLst xmlns:a="http://schemas.openxmlformats.org/drawingml/2006/main">
               <a:ext uri="{FF2B5EF4-FFF2-40B4-BE49-F238E27FC236}">
-                <a16:creationId xmlns:a16="http://schemas.microsoft.com/office/drawing/2014/main" id="{397D36EB-3B56-45CE-AA3A-B5AD1C90D203}"/>
+                <a16:creationId xmlns:a16="http://schemas.microsoft.com/office/drawing/2014/main" id="{BBD84667-72C3-436F-B431-77EE54D6C8ED}"/>
               </a:ext>
             </a:extLst>
           </p:cNvPr>
@@ -10697,7 +10705,7 @@
           <p:cNvPr id="14" name="">
             <a:extLst xmlns:a="http://schemas.openxmlformats.org/drawingml/2006/main">
               <a:ext uri="{FF2B5EF4-FFF2-40B4-BE49-F238E27FC236}">
-                <a16:creationId xmlns:a16="http://schemas.microsoft.com/office/drawing/2014/main" id="{4BED1F14-2ED6-41CD-B097-7C2E94BFD9F0}"/>
+                <a16:creationId xmlns:a16="http://schemas.microsoft.com/office/drawing/2014/main" id="{2A516BB3-5641-443B-967A-BA1155B49D2D}"/>
               </a:ext>
             </a:extLst>
           </p:cNvPr>
@@ -10754,7 +10762,7 @@
           <p:cNvPr id="15" name="">
             <a:extLst xmlns:a="http://schemas.openxmlformats.org/drawingml/2006/main">
               <a:ext uri="{FF2B5EF4-FFF2-40B4-BE49-F238E27FC236}">
-                <a16:creationId xmlns:a16="http://schemas.microsoft.com/office/drawing/2014/main" id="{B7AC3DCF-79E8-4B84-A65B-7824440201C2}"/>
+                <a16:creationId xmlns:a16="http://schemas.microsoft.com/office/drawing/2014/main" id="{51F10EAA-79DF-4A10-B524-8DFE460015C6}"/>
               </a:ext>
             </a:extLst>
           </p:cNvPr>
@@ -10809,7 +10817,7 @@
     </p:spTree>
     <p:extLst>
       <p:ext uri="{BB962C8B-B14F-4D97-AF65-F5344CB8AC3E}">
-        <p14:creationId xmlns:p14="http://schemas.microsoft.com/office/powerpoint/2010/main" val="460304765"/>
+        <p14:creationId xmlns:p14="http://schemas.microsoft.com/office/powerpoint/2010/main" val="94467794"/>
       </p:ext>
     </p:extLst>
   </p:cSld>
@@ -10964,7 +10972,7 @@
           <p:cNvPr id="16" name="">
             <a:extLst xmlns:a="http://schemas.openxmlformats.org/drawingml/2006/main">
               <a:ext uri="{FF2B5EF4-FFF2-40B4-BE49-F238E27FC236}">
-                <a16:creationId xmlns:a16="http://schemas.microsoft.com/office/drawing/2014/main" id="{3C6A30F4-9683-427C-A5E0-C9E4A4F86E4A}"/>
+                <a16:creationId xmlns:a16="http://schemas.microsoft.com/office/drawing/2014/main" id="{ED6D3668-EA8B-4D4A-9582-F20594BFEE96}"/>
               </a:ext>
             </a:extLst>
           </p:cNvPr>
@@ -10996,7 +11004,7 @@
           <p:cNvPr id="2" name="">
             <a:extLst xmlns:a="http://schemas.openxmlformats.org/drawingml/2006/main">
               <a:ext uri="{FF2B5EF4-FFF2-40B4-BE49-F238E27FC236}">
-                <a16:creationId xmlns:a16="http://schemas.microsoft.com/office/drawing/2014/main" id="{C63C99BB-A2B3-40F8-A670-42556A0CAAC8}"/>
+                <a16:creationId xmlns:a16="http://schemas.microsoft.com/office/drawing/2014/main" id="{79162E75-31A6-411E-8082-C8E4D2D8AAAB}"/>
               </a:ext>
             </a:extLst>
           </p:cNvPr>
@@ -11053,7 +11061,7 @@
           <p:cNvPr id="3" name="">
             <a:extLst xmlns:a="http://schemas.openxmlformats.org/drawingml/2006/main">
               <a:ext uri="{FF2B5EF4-FFF2-40B4-BE49-F238E27FC236}">
-                <a16:creationId xmlns:a16="http://schemas.microsoft.com/office/drawing/2014/main" id="{E3606DB4-8DCC-46A1-BA16-1CAE042165BD}"/>
+                <a16:creationId xmlns:a16="http://schemas.microsoft.com/office/drawing/2014/main" id="{73E16325-1748-4799-B299-262CD0F8325C}"/>
               </a:ext>
             </a:extLst>
           </p:cNvPr>
@@ -11085,7 +11093,7 @@
           <p:cNvPr id="4" name="">
             <a:extLst xmlns:a="http://schemas.openxmlformats.org/drawingml/2006/main">
               <a:ext uri="{FF2B5EF4-FFF2-40B4-BE49-F238E27FC236}">
-                <a16:creationId xmlns:a16="http://schemas.microsoft.com/office/drawing/2014/main" id="{9589DC86-3A0C-4C62-8CC4-9A0D307FF6A3}"/>
+                <a16:creationId xmlns:a16="http://schemas.microsoft.com/office/drawing/2014/main" id="{74F6E30C-F078-41A1-AC8E-F13F03245E28}"/>
               </a:ext>
             </a:extLst>
           </p:cNvPr>
@@ -11142,7 +11150,7 @@
           <p:cNvPr id="5" name="">
             <a:extLst xmlns:a="http://schemas.openxmlformats.org/drawingml/2006/main">
               <a:ext uri="{FF2B5EF4-FFF2-40B4-BE49-F238E27FC236}">
-                <a16:creationId xmlns:a16="http://schemas.microsoft.com/office/drawing/2014/main" id="{6B4D946B-38DC-414B-8082-C10C5B04D478}"/>
+                <a16:creationId xmlns:a16="http://schemas.microsoft.com/office/drawing/2014/main" id="{B060DC8F-B260-4D2C-94E1-FE507458965D}"/>
               </a:ext>
             </a:extLst>
           </p:cNvPr>
@@ -11199,7 +11207,7 @@
           <p:cNvPr id="6" name="">
             <a:extLst xmlns:a="http://schemas.openxmlformats.org/drawingml/2006/main">
               <a:ext uri="{FF2B5EF4-FFF2-40B4-BE49-F238E27FC236}">
-                <a16:creationId xmlns:a16="http://schemas.microsoft.com/office/drawing/2014/main" id="{A2FA7398-0D21-4518-BAFA-DA8AEAF49C20}"/>
+                <a16:creationId xmlns:a16="http://schemas.microsoft.com/office/drawing/2014/main" id="{7ED7515E-2DF1-47E6-8256-0C8645A131A0}"/>
               </a:ext>
             </a:extLst>
           </p:cNvPr>
@@ -11256,7 +11264,7 @@
           <p:cNvPr id="7" name="">
             <a:extLst xmlns:a="http://schemas.openxmlformats.org/drawingml/2006/main">
               <a:ext uri="{FF2B5EF4-FFF2-40B4-BE49-F238E27FC236}">
-                <a16:creationId xmlns:a16="http://schemas.microsoft.com/office/drawing/2014/main" id="{4463B517-C4F3-492C-9DAA-B50F35556914}"/>
+                <a16:creationId xmlns:a16="http://schemas.microsoft.com/office/drawing/2014/main" id="{5FC77985-7D9E-41EC-905F-7CBEFC3E95FA}"/>
               </a:ext>
             </a:extLst>
           </p:cNvPr>
@@ -11288,7 +11296,7 @@
           <p:cNvPr id="8" name="">
             <a:extLst xmlns:a="http://schemas.openxmlformats.org/drawingml/2006/main">
               <a:ext uri="{FF2B5EF4-FFF2-40B4-BE49-F238E27FC236}">
-                <a16:creationId xmlns:a16="http://schemas.microsoft.com/office/drawing/2014/main" id="{621B70CE-4362-4B10-A65D-2E4088B95BAC}"/>
+                <a16:creationId xmlns:a16="http://schemas.microsoft.com/office/drawing/2014/main" id="{FC0E6597-2541-4D2A-907F-CBBE2170AFE9}"/>
               </a:ext>
             </a:extLst>
           </p:cNvPr>
@@ -11345,7 +11353,7 @@
           <p:cNvPr id="9" name="">
             <a:extLst xmlns:a="http://schemas.openxmlformats.org/drawingml/2006/main">
               <a:ext uri="{FF2B5EF4-FFF2-40B4-BE49-F238E27FC236}">
-                <a16:creationId xmlns:a16="http://schemas.microsoft.com/office/drawing/2014/main" id="{CD4EFB6F-CA17-4B8E-8A26-31EE75794297}"/>
+                <a16:creationId xmlns:a16="http://schemas.microsoft.com/office/drawing/2014/main" id="{1B84BB55-D1EC-4125-9303-A7DFDB7C60F0}"/>
               </a:ext>
             </a:extLst>
           </p:cNvPr>
@@ -11406,7 +11414,7 @@
           <p:nvPr/>
         </p:nvPicPr>
         <p:blipFill>
-          <a:blip xmlns:r="http://schemas.openxmlformats.org/officeDocument/2006/relationships" xmlns:a="http://schemas.openxmlformats.org/drawingml/2006/main" r:embed="R5189b10f994c4761"/>
+          <a:blip xmlns:r="http://schemas.openxmlformats.org/officeDocument/2006/relationships" xmlns:a="http://schemas.openxmlformats.org/drawingml/2006/main" r:embed="R782854e03f714062"/>
           <a:stretch xmlns:a="http://schemas.openxmlformats.org/drawingml/2006/main"/>
         </p:blipFill>
         <p:spPr>
@@ -11424,7 +11432,7 @@
           <p:cNvPr id="11" name="">
             <a:extLst xmlns:a="http://schemas.openxmlformats.org/drawingml/2006/main">
               <a:ext uri="{FF2B5EF4-FFF2-40B4-BE49-F238E27FC236}">
-                <a16:creationId xmlns:a16="http://schemas.microsoft.com/office/drawing/2014/main" id="{8C506D72-0583-4B88-BE42-769BAE7C3ED8}"/>
+                <a16:creationId xmlns:a16="http://schemas.microsoft.com/office/drawing/2014/main" id="{4E8735D2-9D99-4E61-8D1E-DA5F1188FFE2}"/>
               </a:ext>
             </a:extLst>
           </p:cNvPr>
@@ -11481,7 +11489,7 @@
           <p:cNvPr id="12" name="">
             <a:extLst xmlns:a="http://schemas.openxmlformats.org/drawingml/2006/main">
               <a:ext uri="{FF2B5EF4-FFF2-40B4-BE49-F238E27FC236}">
-                <a16:creationId xmlns:a16="http://schemas.microsoft.com/office/drawing/2014/main" id="{6EF286F0-BCFB-45D0-AF66-3C670E8A1386}"/>
+                <a16:creationId xmlns:a16="http://schemas.microsoft.com/office/drawing/2014/main" id="{272B221D-CDC4-4087-8107-5459F0136019}"/>
               </a:ext>
             </a:extLst>
           </p:cNvPr>
@@ -11538,7 +11546,7 @@
           <p:cNvPr id="13" name="">
             <a:extLst xmlns:a="http://schemas.openxmlformats.org/drawingml/2006/main">
               <a:ext uri="{FF2B5EF4-FFF2-40B4-BE49-F238E27FC236}">
-                <a16:creationId xmlns:a16="http://schemas.microsoft.com/office/drawing/2014/main" id="{D29034E5-8EEC-410D-9E66-56DDF657C415}"/>
+                <a16:creationId xmlns:a16="http://schemas.microsoft.com/office/drawing/2014/main" id="{F84D7F22-0A56-423D-9108-E0452BFF9583}"/>
               </a:ext>
             </a:extLst>
           </p:cNvPr>
@@ -11570,7 +11578,7 @@
           <p:cNvPr id="14" name="">
             <a:extLst xmlns:a="http://schemas.openxmlformats.org/drawingml/2006/main">
               <a:ext uri="{FF2B5EF4-FFF2-40B4-BE49-F238E27FC236}">
-                <a16:creationId xmlns:a16="http://schemas.microsoft.com/office/drawing/2014/main" id="{85777390-1348-4ACF-B384-500DD0DA4473}"/>
+                <a16:creationId xmlns:a16="http://schemas.microsoft.com/office/drawing/2014/main" id="{04FB1615-2FDF-4FFE-86EE-C72A6BBEBE4D}"/>
               </a:ext>
             </a:extLst>
           </p:cNvPr>
@@ -11627,7 +11635,7 @@
           <p:cNvPr id="15" name="">
             <a:extLst xmlns:a="http://schemas.openxmlformats.org/drawingml/2006/main">
               <a:ext uri="{FF2B5EF4-FFF2-40B4-BE49-F238E27FC236}">
-                <a16:creationId xmlns:a16="http://schemas.microsoft.com/office/drawing/2014/main" id="{54C5CB63-FAB2-45DD-A770-FD08764FB225}"/>
+                <a16:creationId xmlns:a16="http://schemas.microsoft.com/office/drawing/2014/main" id="{80D5F476-E4B8-477E-BCC5-9DAD28245E1A}"/>
               </a:ext>
             </a:extLst>
           </p:cNvPr>
@@ -11682,7 +11690,7 @@
     </p:spTree>
     <p:extLst>
       <p:ext uri="{BB962C8B-B14F-4D97-AF65-F5344CB8AC3E}">
-        <p14:creationId xmlns:p14="http://schemas.microsoft.com/office/powerpoint/2010/main" val="701544092"/>
+        <p14:creationId xmlns:p14="http://schemas.microsoft.com/office/powerpoint/2010/main" val="1524435851"/>
       </p:ext>
     </p:extLst>
   </p:cSld>
@@ -11837,7 +11845,7 @@
           <p:cNvPr id="23" name="">
             <a:extLst xmlns:a="http://schemas.openxmlformats.org/drawingml/2006/main">
               <a:ext uri="{FF2B5EF4-FFF2-40B4-BE49-F238E27FC236}">
-                <a16:creationId xmlns:a16="http://schemas.microsoft.com/office/drawing/2014/main" id="{4227301A-E122-4F0F-B2E2-33BF602A4C08}"/>
+                <a16:creationId xmlns:a16="http://schemas.microsoft.com/office/drawing/2014/main" id="{0EACFF04-2B02-4F1F-9328-A29A2C6E1830}"/>
               </a:ext>
             </a:extLst>
           </p:cNvPr>
@@ -11869,7 +11877,7 @@
           <p:cNvPr id="2" name="">
             <a:extLst xmlns:a="http://schemas.openxmlformats.org/drawingml/2006/main">
               <a:ext uri="{FF2B5EF4-FFF2-40B4-BE49-F238E27FC236}">
-                <a16:creationId xmlns:a16="http://schemas.microsoft.com/office/drawing/2014/main" id="{2C9BD994-5907-4B79-B856-D785DDCA603F}"/>
+                <a16:creationId xmlns:a16="http://schemas.microsoft.com/office/drawing/2014/main" id="{D371EE71-C76E-46A8-A725-8FC2B8564270}"/>
               </a:ext>
             </a:extLst>
           </p:cNvPr>
@@ -11926,7 +11934,7 @@
           <p:cNvPr id="3" name="">
             <a:extLst xmlns:a="http://schemas.openxmlformats.org/drawingml/2006/main">
               <a:ext uri="{FF2B5EF4-FFF2-40B4-BE49-F238E27FC236}">
-                <a16:creationId xmlns:a16="http://schemas.microsoft.com/office/drawing/2014/main" id="{5CC789BC-1416-48BF-AFD3-5ABE5C4F0AEA}"/>
+                <a16:creationId xmlns:a16="http://schemas.microsoft.com/office/drawing/2014/main" id="{FE4D55C0-E6D5-4F66-B546-EE9F2BCF8FC9}"/>
               </a:ext>
             </a:extLst>
           </p:cNvPr>
@@ -11958,7 +11966,7 @@
           <p:cNvPr id="4" name="">
             <a:extLst xmlns:a="http://schemas.openxmlformats.org/drawingml/2006/main">
               <a:ext uri="{FF2B5EF4-FFF2-40B4-BE49-F238E27FC236}">
-                <a16:creationId xmlns:a16="http://schemas.microsoft.com/office/drawing/2014/main" id="{35D8F986-1C1D-43B9-993A-D2747305A335}"/>
+                <a16:creationId xmlns:a16="http://schemas.microsoft.com/office/drawing/2014/main" id="{2184BBB6-3963-4B2F-BBD9-6A35BA91B092}"/>
               </a:ext>
             </a:extLst>
           </p:cNvPr>
@@ -12015,7 +12023,7 @@
           <p:cNvPr id="5" name="">
             <a:extLst xmlns:a="http://schemas.openxmlformats.org/drawingml/2006/main">
               <a:ext uri="{FF2B5EF4-FFF2-40B4-BE49-F238E27FC236}">
-                <a16:creationId xmlns:a16="http://schemas.microsoft.com/office/drawing/2014/main" id="{17D5CA27-E57A-48DE-B22F-A0AA24E12DBB}"/>
+                <a16:creationId xmlns:a16="http://schemas.microsoft.com/office/drawing/2014/main" id="{5ED26AAA-479A-44EF-A294-A18375D695C7}"/>
               </a:ext>
             </a:extLst>
           </p:cNvPr>
@@ -12072,7 +12080,7 @@
           <p:cNvPr id="6" name="">
             <a:extLst xmlns:a="http://schemas.openxmlformats.org/drawingml/2006/main">
               <a:ext uri="{FF2B5EF4-FFF2-40B4-BE49-F238E27FC236}">
-                <a16:creationId xmlns:a16="http://schemas.microsoft.com/office/drawing/2014/main" id="{58897BB1-1E30-4FD7-8CFF-8EB3D189F3CE}"/>
+                <a16:creationId xmlns:a16="http://schemas.microsoft.com/office/drawing/2014/main" id="{01D4A6AF-9058-4039-AB26-C7DAC4E7745B}"/>
               </a:ext>
             </a:extLst>
           </p:cNvPr>
@@ -12129,7 +12137,7 @@
           <p:cNvPr id="7" name="">
             <a:extLst xmlns:a="http://schemas.openxmlformats.org/drawingml/2006/main">
               <a:ext uri="{FF2B5EF4-FFF2-40B4-BE49-F238E27FC236}">
-                <a16:creationId xmlns:a16="http://schemas.microsoft.com/office/drawing/2014/main" id="{892A5BE3-BD8F-4A1C-91A9-42057D8138DD}"/>
+                <a16:creationId xmlns:a16="http://schemas.microsoft.com/office/drawing/2014/main" id="{733A1E93-D254-4C99-B649-0F18EA5A199F}"/>
               </a:ext>
             </a:extLst>
           </p:cNvPr>
@@ -12161,7 +12169,7 @@
           <p:cNvPr id="8" name="">
             <a:extLst xmlns:a="http://schemas.openxmlformats.org/drawingml/2006/main">
               <a:ext uri="{FF2B5EF4-FFF2-40B4-BE49-F238E27FC236}">
-                <a16:creationId xmlns:a16="http://schemas.microsoft.com/office/drawing/2014/main" id="{8A261DD6-27C3-43A5-8FFB-196794597D61}"/>
+                <a16:creationId xmlns:a16="http://schemas.microsoft.com/office/drawing/2014/main" id="{51C1083B-08D1-49EB-AE57-59D2D042859C}"/>
               </a:ext>
             </a:extLst>
           </p:cNvPr>
@@ -12218,7 +12226,7 @@
           <p:cNvPr id="9" name="">
             <a:extLst xmlns:a="http://schemas.openxmlformats.org/drawingml/2006/main">
               <a:ext uri="{FF2B5EF4-FFF2-40B4-BE49-F238E27FC236}">
-                <a16:creationId xmlns:a16="http://schemas.microsoft.com/office/drawing/2014/main" id="{F6612FE7-CC5C-44A2-8A20-C9241E7FD5EC}"/>
+                <a16:creationId xmlns:a16="http://schemas.microsoft.com/office/drawing/2014/main" id="{644743B8-66C1-4831-9562-95DCC690F2DB}"/>
               </a:ext>
             </a:extLst>
           </p:cNvPr>
@@ -12275,7 +12283,7 @@
           <p:cNvPr id="10" name="">
             <a:extLst xmlns:a="http://schemas.openxmlformats.org/drawingml/2006/main">
               <a:ext uri="{FF2B5EF4-FFF2-40B4-BE49-F238E27FC236}">
-                <a16:creationId xmlns:a16="http://schemas.microsoft.com/office/drawing/2014/main" id="{9359517B-0FEB-4739-98DC-47C7959B75C3}"/>
+                <a16:creationId xmlns:a16="http://schemas.microsoft.com/office/drawing/2014/main" id="{C0D60E9F-F67A-4958-A9C3-1F79E8599DB5}"/>
               </a:ext>
             </a:extLst>
           </p:cNvPr>
@@ -12309,7 +12317,7 @@
           <p:cNvPr id="11" name="">
             <a:extLst xmlns:a="http://schemas.openxmlformats.org/drawingml/2006/main">
               <a:ext uri="{FF2B5EF4-FFF2-40B4-BE49-F238E27FC236}">
-                <a16:creationId xmlns:a16="http://schemas.microsoft.com/office/drawing/2014/main" id="{DAAA6DDF-332D-4550-A495-2A76DCF7D321}"/>
+                <a16:creationId xmlns:a16="http://schemas.microsoft.com/office/drawing/2014/main" id="{44288D05-4CB6-43B8-9CF0-0821DA54101A}"/>
               </a:ext>
             </a:extLst>
           </p:cNvPr>
@@ -12341,7 +12349,7 @@
           <p:cNvPr id="12" name="">
             <a:extLst xmlns:a="http://schemas.openxmlformats.org/drawingml/2006/main">
               <a:ext uri="{FF2B5EF4-FFF2-40B4-BE49-F238E27FC236}">
-                <a16:creationId xmlns:a16="http://schemas.microsoft.com/office/drawing/2014/main" id="{FF0C7034-2B53-4104-99DD-3F75841FED48}"/>
+                <a16:creationId xmlns:a16="http://schemas.microsoft.com/office/drawing/2014/main" id="{0BB8ED52-EB8B-4831-B4AE-0E88992B5E50}"/>
               </a:ext>
             </a:extLst>
           </p:cNvPr>
@@ -12398,7 +12406,7 @@
           <p:cNvPr id="13" name="">
             <a:extLst xmlns:a="http://schemas.openxmlformats.org/drawingml/2006/main">
               <a:ext uri="{FF2B5EF4-FFF2-40B4-BE49-F238E27FC236}">
-                <a16:creationId xmlns:a16="http://schemas.microsoft.com/office/drawing/2014/main" id="{4F8331CB-58AB-4AFA-B7B7-A856A3D7718A}"/>
+                <a16:creationId xmlns:a16="http://schemas.microsoft.com/office/drawing/2014/main" id="{AF60BC60-5DCA-471C-AD22-46F1CC7D0462}"/>
               </a:ext>
             </a:extLst>
           </p:cNvPr>
@@ -12455,7 +12463,7 @@
           <p:cNvPr id="14" name="">
             <a:extLst xmlns:a="http://schemas.openxmlformats.org/drawingml/2006/main">
               <a:ext uri="{FF2B5EF4-FFF2-40B4-BE49-F238E27FC236}">
-                <a16:creationId xmlns:a16="http://schemas.microsoft.com/office/drawing/2014/main" id="{8BB0FF4C-2AAA-4AB3-829A-38F3F5E161A5}"/>
+                <a16:creationId xmlns:a16="http://schemas.microsoft.com/office/drawing/2014/main" id="{DF1AF1A7-575C-4482-85F3-FF8EDF8D74D4}"/>
               </a:ext>
             </a:extLst>
           </p:cNvPr>
@@ -12489,7 +12497,7 @@
           <p:cNvPr id="15" name="">
             <a:extLst xmlns:a="http://schemas.openxmlformats.org/drawingml/2006/main">
               <a:ext uri="{FF2B5EF4-FFF2-40B4-BE49-F238E27FC236}">
-                <a16:creationId xmlns:a16="http://schemas.microsoft.com/office/drawing/2014/main" id="{7BF5E923-0F1A-434B-B115-F50BB5CD30D8}"/>
+                <a16:creationId xmlns:a16="http://schemas.microsoft.com/office/drawing/2014/main" id="{85420E6B-68AE-45DA-BA22-8824F1E8552F}"/>
               </a:ext>
             </a:extLst>
           </p:cNvPr>
@@ -12521,7 +12529,7 @@
           <p:cNvPr id="16" name="">
             <a:extLst xmlns:a="http://schemas.openxmlformats.org/drawingml/2006/main">
               <a:ext uri="{FF2B5EF4-FFF2-40B4-BE49-F238E27FC236}">
-                <a16:creationId xmlns:a16="http://schemas.microsoft.com/office/drawing/2014/main" id="{C0C56400-FA81-42A1-A765-BC6805772784}"/>
+                <a16:creationId xmlns:a16="http://schemas.microsoft.com/office/drawing/2014/main" id="{E8B93CDE-07B1-4FF9-BA8B-5691AF1D074D}"/>
               </a:ext>
             </a:extLst>
           </p:cNvPr>
@@ -12578,7 +12586,7 @@
           <p:cNvPr id="17" name="">
             <a:extLst xmlns:a="http://schemas.openxmlformats.org/drawingml/2006/main">
               <a:ext uri="{FF2B5EF4-FFF2-40B4-BE49-F238E27FC236}">
-                <a16:creationId xmlns:a16="http://schemas.microsoft.com/office/drawing/2014/main" id="{53E823A6-CFFE-4A4B-8466-99E92604E0E3}"/>
+                <a16:creationId xmlns:a16="http://schemas.microsoft.com/office/drawing/2014/main" id="{3DE2883F-2DD7-4F68-8FFE-6CD2D6493E13}"/>
               </a:ext>
             </a:extLst>
           </p:cNvPr>
@@ -12635,7 +12643,7 @@
           <p:cNvPr id="18" name="">
             <a:extLst xmlns:a="http://schemas.openxmlformats.org/drawingml/2006/main">
               <a:ext uri="{FF2B5EF4-FFF2-40B4-BE49-F238E27FC236}">
-                <a16:creationId xmlns:a16="http://schemas.microsoft.com/office/drawing/2014/main" id="{957AC02B-B78B-426D-A07E-7C2B223A5244}"/>
+                <a16:creationId xmlns:a16="http://schemas.microsoft.com/office/drawing/2014/main" id="{8262F3C9-F53E-4FBB-911A-77D1A8A0ED61}"/>
               </a:ext>
             </a:extLst>
           </p:cNvPr>
@@ -12669,7 +12677,7 @@
           <p:cNvPr id="19" name="">
             <a:extLst xmlns:a="http://schemas.openxmlformats.org/drawingml/2006/main">
               <a:ext uri="{FF2B5EF4-FFF2-40B4-BE49-F238E27FC236}">
-                <a16:creationId xmlns:a16="http://schemas.microsoft.com/office/drawing/2014/main" id="{2CDF66AD-D8D8-4B4D-8CE8-04BBDE5564E3}"/>
+                <a16:creationId xmlns:a16="http://schemas.microsoft.com/office/drawing/2014/main" id="{867129F1-3DEA-4E68-BE65-BF059C7E8CEC}"/>
               </a:ext>
             </a:extLst>
           </p:cNvPr>
@@ -12701,7 +12709,7 @@
           <p:cNvPr id="20" name="">
             <a:extLst xmlns:a="http://schemas.openxmlformats.org/drawingml/2006/main">
               <a:ext uri="{FF2B5EF4-FFF2-40B4-BE49-F238E27FC236}">
-                <a16:creationId xmlns:a16="http://schemas.microsoft.com/office/drawing/2014/main" id="{1E39E3CB-28A3-41C1-8DE2-E366BC21D205}"/>
+                <a16:creationId xmlns:a16="http://schemas.microsoft.com/office/drawing/2014/main" id="{5DC1BF76-EA77-4F16-B865-A53EDBF6651C}"/>
               </a:ext>
             </a:extLst>
           </p:cNvPr>
@@ -12758,7 +12766,7 @@
           <p:cNvPr id="21" name="">
             <a:extLst xmlns:a="http://schemas.openxmlformats.org/drawingml/2006/main">
               <a:ext uri="{FF2B5EF4-FFF2-40B4-BE49-F238E27FC236}">
-                <a16:creationId xmlns:a16="http://schemas.microsoft.com/office/drawing/2014/main" id="{DDEC5B18-D848-4282-8A95-E8357B720C78}"/>
+                <a16:creationId xmlns:a16="http://schemas.microsoft.com/office/drawing/2014/main" id="{F0731B3B-2772-4EDC-A17D-F2B8A07E9620}"/>
               </a:ext>
             </a:extLst>
           </p:cNvPr>
@@ -12815,7 +12823,7 @@
           <p:cNvPr id="22" name="">
             <a:extLst xmlns:a="http://schemas.openxmlformats.org/drawingml/2006/main">
               <a:ext uri="{FF2B5EF4-FFF2-40B4-BE49-F238E27FC236}">
-                <a16:creationId xmlns:a16="http://schemas.microsoft.com/office/drawing/2014/main" id="{1E771A1A-8B5B-4F04-AFAD-F9F140862756}"/>
+                <a16:creationId xmlns:a16="http://schemas.microsoft.com/office/drawing/2014/main" id="{2A0F5581-C377-4387-ABDC-63F9F4C702F3}"/>
               </a:ext>
             </a:extLst>
           </p:cNvPr>
@@ -12870,7 +12878,7 @@
     </p:spTree>
     <p:extLst>
       <p:ext uri="{BB962C8B-B14F-4D97-AF65-F5344CB8AC3E}">
-        <p14:creationId xmlns:p14="http://schemas.microsoft.com/office/powerpoint/2010/main" val="444280657"/>
+        <p14:creationId xmlns:p14="http://schemas.microsoft.com/office/powerpoint/2010/main" val="268626334"/>
       </p:ext>
     </p:extLst>
   </p:cSld>
@@ -13071,7 +13079,7 @@
           <p:cNvPr id="22" name="">
             <a:extLst xmlns:a="http://schemas.openxmlformats.org/drawingml/2006/main">
               <a:ext uri="{FF2B5EF4-FFF2-40B4-BE49-F238E27FC236}">
-                <a16:creationId xmlns:a16="http://schemas.microsoft.com/office/drawing/2014/main" id="{62462FA9-5B4B-4C93-8EDA-9ABDE4993342}"/>
+                <a16:creationId xmlns:a16="http://schemas.microsoft.com/office/drawing/2014/main" id="{37A17F85-B5D2-447B-844F-5D9F0FD7E48C}"/>
               </a:ext>
             </a:extLst>
           </p:cNvPr>
@@ -13103,7 +13111,7 @@
           <p:cNvPr id="2" name="">
             <a:extLst xmlns:a="http://schemas.openxmlformats.org/drawingml/2006/main">
               <a:ext uri="{FF2B5EF4-FFF2-40B4-BE49-F238E27FC236}">
-                <a16:creationId xmlns:a16="http://schemas.microsoft.com/office/drawing/2014/main" id="{62290FBB-9EF8-4E0E-AEEC-D76F33974578}"/>
+                <a16:creationId xmlns:a16="http://schemas.microsoft.com/office/drawing/2014/main" id="{3A514435-B952-4B75-B579-91A02F262923}"/>
               </a:ext>
             </a:extLst>
           </p:cNvPr>
@@ -13160,7 +13168,7 @@
           <p:cNvPr id="3" name="">
             <a:extLst xmlns:a="http://schemas.openxmlformats.org/drawingml/2006/main">
               <a:ext uri="{FF2B5EF4-FFF2-40B4-BE49-F238E27FC236}">
-                <a16:creationId xmlns:a16="http://schemas.microsoft.com/office/drawing/2014/main" id="{68693435-FABE-41BB-B444-E0075D46A5CE}"/>
+                <a16:creationId xmlns:a16="http://schemas.microsoft.com/office/drawing/2014/main" id="{3C605DCE-CFB9-4ECC-AF16-7A56A0D852D7}"/>
               </a:ext>
             </a:extLst>
           </p:cNvPr>
@@ -13192,7 +13200,7 @@
           <p:cNvPr id="4" name="">
             <a:extLst xmlns:a="http://schemas.openxmlformats.org/drawingml/2006/main">
               <a:ext uri="{FF2B5EF4-FFF2-40B4-BE49-F238E27FC236}">
-                <a16:creationId xmlns:a16="http://schemas.microsoft.com/office/drawing/2014/main" id="{44C67FC4-BBBB-482E-958D-370E492A9830}"/>
+                <a16:creationId xmlns:a16="http://schemas.microsoft.com/office/drawing/2014/main" id="{EE337B2E-8B47-448D-BA4D-83D4EC486C7A}"/>
               </a:ext>
             </a:extLst>
           </p:cNvPr>
@@ -13249,7 +13257,7 @@
           <p:cNvPr id="5" name="">
             <a:extLst xmlns:a="http://schemas.openxmlformats.org/drawingml/2006/main">
               <a:ext uri="{FF2B5EF4-FFF2-40B4-BE49-F238E27FC236}">
-                <a16:creationId xmlns:a16="http://schemas.microsoft.com/office/drawing/2014/main" id="{52EFD86A-3137-44E8-8917-8EB992D59422}"/>
+                <a16:creationId xmlns:a16="http://schemas.microsoft.com/office/drawing/2014/main" id="{2C23641C-582E-41AF-BE99-E704B0473003}"/>
               </a:ext>
             </a:extLst>
           </p:cNvPr>
@@ -13306,7 +13314,7 @@
           <p:cNvPr id="6" name="">
             <a:extLst xmlns:a="http://schemas.openxmlformats.org/drawingml/2006/main">
               <a:ext uri="{FF2B5EF4-FFF2-40B4-BE49-F238E27FC236}">
-                <a16:creationId xmlns:a16="http://schemas.microsoft.com/office/drawing/2014/main" id="{9AD79945-85AE-406C-A843-9DC428E96120}"/>
+                <a16:creationId xmlns:a16="http://schemas.microsoft.com/office/drawing/2014/main" id="{6A2043CB-F842-4B38-AE8D-C7380378A107}"/>
               </a:ext>
             </a:extLst>
           </p:cNvPr>
@@ -13363,7 +13371,7 @@
           <p:cNvPr id="7" name="">
             <a:extLst xmlns:a="http://schemas.openxmlformats.org/drawingml/2006/main">
               <a:ext uri="{FF2B5EF4-FFF2-40B4-BE49-F238E27FC236}">
-                <a16:creationId xmlns:a16="http://schemas.microsoft.com/office/drawing/2014/main" id="{6914D57D-0F73-4539-92F8-FACC9F9E96E8}"/>
+                <a16:creationId xmlns:a16="http://schemas.microsoft.com/office/drawing/2014/main" id="{7B62C263-308D-40F8-B0B2-76AB9A80BF07}"/>
               </a:ext>
             </a:extLst>
           </p:cNvPr>
@@ -13395,7 +13403,7 @@
           <p:cNvPr id="8" name="">
             <a:extLst xmlns:a="http://schemas.openxmlformats.org/drawingml/2006/main">
               <a:ext uri="{FF2B5EF4-FFF2-40B4-BE49-F238E27FC236}">
-                <a16:creationId xmlns:a16="http://schemas.microsoft.com/office/drawing/2014/main" id="{BD31B110-1ED2-4425-868B-5764F2D0B73A}"/>
+                <a16:creationId xmlns:a16="http://schemas.microsoft.com/office/drawing/2014/main" id="{0B5CA669-0FA0-460A-B5D3-5834F0AC9F70}"/>
               </a:ext>
             </a:extLst>
           </p:cNvPr>
@@ -13452,7 +13460,7 @@
           <p:cNvPr id="9" name="">
             <a:extLst xmlns:a="http://schemas.openxmlformats.org/drawingml/2006/main">
               <a:ext uri="{FF2B5EF4-FFF2-40B4-BE49-F238E27FC236}">
-                <a16:creationId xmlns:a16="http://schemas.microsoft.com/office/drawing/2014/main" id="{D72057CB-514B-4C40-963B-A80D8638B383}"/>
+                <a16:creationId xmlns:a16="http://schemas.microsoft.com/office/drawing/2014/main" id="{4E4A6136-77B0-4D24-A6BE-3C7556F1EFEC}"/>
               </a:ext>
             </a:extLst>
           </p:cNvPr>
@@ -13509,7 +13517,7 @@
           <p:cNvPr id="10" name="">
             <a:extLst xmlns:a="http://schemas.openxmlformats.org/drawingml/2006/main">
               <a:ext uri="{FF2B5EF4-FFF2-40B4-BE49-F238E27FC236}">
-                <a16:creationId xmlns:a16="http://schemas.microsoft.com/office/drawing/2014/main" id="{6E062BE9-8B45-4A79-B46F-F35FA3B8A555}"/>
+                <a16:creationId xmlns:a16="http://schemas.microsoft.com/office/drawing/2014/main" id="{C8A39408-65EE-47A5-B9D5-16CA49BC34D1}"/>
               </a:ext>
             </a:extLst>
           </p:cNvPr>
@@ -13543,7 +13551,7 @@
           <p:cNvPr id="11" name="">
             <a:extLst xmlns:a="http://schemas.openxmlformats.org/drawingml/2006/main">
               <a:ext uri="{FF2B5EF4-FFF2-40B4-BE49-F238E27FC236}">
-                <a16:creationId xmlns:a16="http://schemas.microsoft.com/office/drawing/2014/main" id="{2E0868E2-C99D-4CA7-A523-B4F555901C7B}"/>
+                <a16:creationId xmlns:a16="http://schemas.microsoft.com/office/drawing/2014/main" id="{A090AB47-C5E8-4B22-8D83-3777F927B1FE}"/>
               </a:ext>
             </a:extLst>
           </p:cNvPr>
@@ -13575,7 +13583,7 @@
           <p:cNvPr id="12" name="">
             <a:extLst xmlns:a="http://schemas.openxmlformats.org/drawingml/2006/main">
               <a:ext uri="{FF2B5EF4-FFF2-40B4-BE49-F238E27FC236}">
-                <a16:creationId xmlns:a16="http://schemas.microsoft.com/office/drawing/2014/main" id="{6760FDF9-23E4-4C3E-AA62-6FA340ACC5A0}"/>
+                <a16:creationId xmlns:a16="http://schemas.microsoft.com/office/drawing/2014/main" id="{51A987CA-6A78-47F4-B9BC-6ABB08EEF77F}"/>
               </a:ext>
             </a:extLst>
           </p:cNvPr>
@@ -13632,7 +13640,7 @@
           <p:cNvPr id="13" name="">
             <a:extLst xmlns:a="http://schemas.openxmlformats.org/drawingml/2006/main">
               <a:ext uri="{FF2B5EF4-FFF2-40B4-BE49-F238E27FC236}">
-                <a16:creationId xmlns:a16="http://schemas.microsoft.com/office/drawing/2014/main" id="{26CC48FE-7DE0-4A1C-BD12-71F979484F90}"/>
+                <a16:creationId xmlns:a16="http://schemas.microsoft.com/office/drawing/2014/main" id="{E15BE6A4-BBB3-427C-984A-BC395DA2D689}"/>
               </a:ext>
             </a:extLst>
           </p:cNvPr>
@@ -13689,7 +13697,7 @@
           <p:cNvPr id="14" name="">
             <a:extLst xmlns:a="http://schemas.openxmlformats.org/drawingml/2006/main">
               <a:ext uri="{FF2B5EF4-FFF2-40B4-BE49-F238E27FC236}">
-                <a16:creationId xmlns:a16="http://schemas.microsoft.com/office/drawing/2014/main" id="{6A009ECE-27F8-4925-9E26-5E355FEE039F}"/>
+                <a16:creationId xmlns:a16="http://schemas.microsoft.com/office/drawing/2014/main" id="{D5764F8E-C16C-409A-AC62-CFE337F215B4}"/>
               </a:ext>
             </a:extLst>
           </p:cNvPr>
@@ -13723,7 +13731,7 @@
           <p:cNvPr id="15" name="">
             <a:extLst xmlns:a="http://schemas.openxmlformats.org/drawingml/2006/main">
               <a:ext uri="{FF2B5EF4-FFF2-40B4-BE49-F238E27FC236}">
-                <a16:creationId xmlns:a16="http://schemas.microsoft.com/office/drawing/2014/main" id="{0C191371-4526-44E6-A179-DD68FBDFA30E}"/>
+                <a16:creationId xmlns:a16="http://schemas.microsoft.com/office/drawing/2014/main" id="{10E6AD5B-D7A2-4093-A281-FBF2DB83A65D}"/>
               </a:ext>
             </a:extLst>
           </p:cNvPr>
@@ -13755,7 +13763,7 @@
           <p:cNvPr id="16" name="">
             <a:extLst xmlns:a="http://schemas.openxmlformats.org/drawingml/2006/main">
               <a:ext uri="{FF2B5EF4-FFF2-40B4-BE49-F238E27FC236}">
-                <a16:creationId xmlns:a16="http://schemas.microsoft.com/office/drawing/2014/main" id="{4BC9BCCC-C70D-4430-9EDC-4EC7CBBBAB8A}"/>
+                <a16:creationId xmlns:a16="http://schemas.microsoft.com/office/drawing/2014/main" id="{DD6B1FA3-30F5-4B19-8301-217B64D8B16F}"/>
               </a:ext>
             </a:extLst>
           </p:cNvPr>
@@ -13812,7 +13820,7 @@
           <p:cNvPr id="17" name="">
             <a:extLst xmlns:a="http://schemas.openxmlformats.org/drawingml/2006/main">
               <a:ext uri="{FF2B5EF4-FFF2-40B4-BE49-F238E27FC236}">
-                <a16:creationId xmlns:a16="http://schemas.microsoft.com/office/drawing/2014/main" id="{A38DE491-D2C0-4602-80F1-C4FE930C7B99}"/>
+                <a16:creationId xmlns:a16="http://schemas.microsoft.com/office/drawing/2014/main" id="{A5FE1A8F-EBA9-48D4-8E83-B591907A3D0D}"/>
               </a:ext>
             </a:extLst>
           </p:cNvPr>
@@ -13869,7 +13877,7 @@
           <p:cNvPr id="18" name="">
             <a:extLst xmlns:a="http://schemas.openxmlformats.org/drawingml/2006/main">
               <a:ext uri="{FF2B5EF4-FFF2-40B4-BE49-F238E27FC236}">
-                <a16:creationId xmlns:a16="http://schemas.microsoft.com/office/drawing/2014/main" id="{2B870AB5-6428-4492-AAE3-B5A5E2283EBE}"/>
+                <a16:creationId xmlns:a16="http://schemas.microsoft.com/office/drawing/2014/main" id="{0CEE0ADF-6398-4D58-8F85-CD232C9F5A14}"/>
               </a:ext>
             </a:extLst>
           </p:cNvPr>
@@ -13903,7 +13911,7 @@
           <p:cNvPr id="19" name="">
             <a:extLst xmlns:a="http://schemas.openxmlformats.org/drawingml/2006/main">
               <a:ext uri="{FF2B5EF4-FFF2-40B4-BE49-F238E27FC236}">
-                <a16:creationId xmlns:a16="http://schemas.microsoft.com/office/drawing/2014/main" id="{575DCC2E-C67B-461B-B569-896779992E65}"/>
+                <a16:creationId xmlns:a16="http://schemas.microsoft.com/office/drawing/2014/main" id="{0B2C01E5-4A93-42E9-AAC0-699DE9C45298}"/>
               </a:ext>
             </a:extLst>
           </p:cNvPr>
@@ -13935,7 +13943,7 @@
           <p:cNvPr id="20" name="">
             <a:extLst xmlns:a="http://schemas.openxmlformats.org/drawingml/2006/main">
               <a:ext uri="{FF2B5EF4-FFF2-40B4-BE49-F238E27FC236}">
-                <a16:creationId xmlns:a16="http://schemas.microsoft.com/office/drawing/2014/main" id="{3F814BC7-62F7-407E-A249-69A2017E5836}"/>
+                <a16:creationId xmlns:a16="http://schemas.microsoft.com/office/drawing/2014/main" id="{8530ACEC-BCD0-47FD-977C-982D249CCD80}"/>
               </a:ext>
             </a:extLst>
           </p:cNvPr>
@@ -13992,7 +14000,7 @@
           <p:cNvPr id="21" name="">
             <a:extLst xmlns:a="http://schemas.openxmlformats.org/drawingml/2006/main">
               <a:ext uri="{FF2B5EF4-FFF2-40B4-BE49-F238E27FC236}">
-                <a16:creationId xmlns:a16="http://schemas.microsoft.com/office/drawing/2014/main" id="{3A4C0503-9C03-48A3-9F42-6EF1E4141DF1}"/>
+                <a16:creationId xmlns:a16="http://schemas.microsoft.com/office/drawing/2014/main" id="{AA820870-54B1-4685-B6B6-F8CD1F0C30E8}"/>
               </a:ext>
             </a:extLst>
           </p:cNvPr>
@@ -14047,7 +14055,7 @@
     </p:spTree>
     <p:extLst>
       <p:ext uri="{BB962C8B-B14F-4D97-AF65-F5344CB8AC3E}">
-        <p14:creationId xmlns:p14="http://schemas.microsoft.com/office/powerpoint/2010/main" val="462496080"/>
+        <p14:creationId xmlns:p14="http://schemas.microsoft.com/office/powerpoint/2010/main" val="1517517088"/>
       </p:ext>
     </p:extLst>
   </p:cSld>
